--- a/DrinkBot_MLOps_Presentation_EN.pptx
+++ b/DrinkBot_MLOps_Presentation_EN.pptx
@@ -3112,7 +3112,7 @@
             <a:avLst/>
           </a:prstGeom>
           <a:solidFill>
-            <a:srgbClr val="F8FAFC"/>
+            <a:srgbClr val="FFFFFF"/>
           </a:solidFill>
           <a:ln>
             <a:noFill/>
@@ -3163,14 +3163,14 @@
           <a:lstStyle/>
           <a:p>
             <a:pPr>
-              <a:defRPr sz="1000">
-                <a:solidFill>
-                  <a:srgbClr val="94A3B8"/>
-                </a:solidFill>
-              </a:defRPr>
-            </a:pPr>
-            <a:r>
-              <a:t>DrinkBot MLOps • TMA Solutions F&amp;B AI Workshop 2026 • Backend Architecture Review</a:t>
+              <a:defRPr sz="1100">
+                <a:solidFill>
+                  <a:srgbClr val="64748B"/>
+                </a:solidFill>
+              </a:defRPr>
+            </a:pPr>
+            <a:r>
+              <a:t>DrinkBot MLOps • F&amp;B AI Assistant &amp; Management Platform</a:t>
             </a:r>
           </a:p>
         </p:txBody>
@@ -3184,7 +3184,7 @@
         <p:spPr>
           <a:xfrm>
             <a:off x="731520" y="1005840"/>
-            <a:ext cx="3291840" cy="384048"/>
+            <a:ext cx="3108960" cy="411480"/>
           </a:xfrm>
           <a:prstGeom prst="roundRect">
             <a:avLst/>
@@ -3192,7 +3192,7 @@
           <a:solidFill>
             <a:srgbClr val="FEF3C7"/>
           </a:solidFill>
-          <a:ln w="15240">
+          <a:ln w="19050">
             <a:solidFill>
               <a:srgbClr val="F59E0B"/>
             </a:solidFill>
@@ -3217,14 +3217,14 @@
           <a:lstStyle/>
           <a:p>
             <a:pPr algn="ctr">
-              <a:defRPr sz="1100" b="1">
+              <a:defRPr sz="1200" b="1">
                 <a:solidFill>
                   <a:srgbClr val="78350F"/>
                 </a:solidFill>
               </a:defRPr>
             </a:pPr>
             <a:r>
-              <a:t>☕ TMA SOLUTIONS • F&amp;B AI WORKSHOP 2026</a:t>
+              <a:t>☕ F&amp;B AI WORKSHOP 2026</a:t>
             </a:r>
           </a:p>
         </p:txBody>
@@ -3252,7 +3252,7 @@
           <a:lstStyle/>
           <a:p>
             <a:pPr>
-              <a:defRPr sz="4600" b="1">
+              <a:defRPr sz="5000" b="1">
                 <a:solidFill>
                   <a:srgbClr val="78350F"/>
                 </a:solidFill>
@@ -3267,14 +3267,14 @@
               <a:spcBef>
                 <a:spcPts val="800"/>
               </a:spcBef>
-              <a:defRPr sz="2800" b="1">
+              <a:defRPr sz="3000" b="1">
                 <a:solidFill>
                   <a:srgbClr val="0F172A"/>
                 </a:solidFill>
               </a:defRPr>
             </a:pPr>
             <a:r>
-              <a:t>Backend Architecture &amp; Engineering Status Review</a:t>
+              <a:t>Smart Beverage Assistant &amp; MLOps Platform</a:t>
             </a:r>
           </a:p>
           <a:p>
@@ -3282,18 +3282,18 @@
               <a:spcBef>
                 <a:spcPts val="1200"/>
               </a:spcBef>
-              <a:defRPr sz="1500">
-                <a:solidFill>
-                  <a:srgbClr val="475569"/>
-                </a:solidFill>
-              </a:defRPr>
-            </a:pPr>
-            <a:r>
-              <a:t>Production-grade autonomous beverage recommendation agent with DB prompt versioning,</a:t>
+              <a:defRPr sz="1600">
+                <a:solidFill>
+                  <a:srgbClr val="64748B"/>
+                </a:solidFill>
+              </a:defRPr>
+            </a:pPr>
+            <a:r>
+              <a:t>Autonomous AI drink ordering, customer preference memory, prompt version control,</a:t>
             </a:r>
             <a:br/>
             <a:r>
-              <a:t>two-stage human-in-the-loop approval, local fine-tuned SLM, and zero-cost Ollama fallback.</a:t>
+              <a:t>and high-availability multi-model infrastructure.</a:t>
             </a:r>
           </a:p>
         </p:txBody>
@@ -3307,13 +3307,13 @@
         <p:spPr>
           <a:xfrm>
             <a:off x="731520" y="4297680"/>
-            <a:ext cx="2468880" cy="1645920"/>
+            <a:ext cx="2468880" cy="1691640"/>
           </a:xfrm>
           <a:prstGeom prst="roundRect">
             <a:avLst/>
           </a:prstGeom>
           <a:solidFill>
-            <a:srgbClr val="FFFFFF"/>
+            <a:srgbClr val="F8FAFC"/>
           </a:solidFill>
           <a:ln w="19050">
             <a:solidFill>
@@ -3352,7 +3352,7 @@
         <p:spPr>
           <a:xfrm>
             <a:off x="731520" y="4297680"/>
-            <a:ext cx="2468880" cy="73152"/>
+            <a:ext cx="2468880" cy="91440"/>
           </a:xfrm>
           <a:prstGeom prst="rect">
             <a:avLst/>
@@ -3394,8 +3394,8 @@
         </p:nvSpPr>
         <p:spPr>
           <a:xfrm>
-            <a:off x="914400" y="4434840"/>
-            <a:ext cx="2103120" cy="1371600"/>
+            <a:off x="914400" y="4480560"/>
+            <a:ext cx="2103120" cy="1417320"/>
           </a:xfrm>
           <a:prstGeom prst="rect">
             <a:avLst/>
@@ -3409,14 +3409,14 @@
           <a:lstStyle/>
           <a:p>
             <a:pPr>
-              <a:defRPr sz="1100" b="1">
+              <a:defRPr sz="1200" b="1">
                 <a:solidFill>
                   <a:srgbClr val="0284C7"/>
                 </a:solidFill>
               </a:defRPr>
             </a:pPr>
             <a:r>
-              <a:t>CORE BACKEND</a:t>
+              <a:t>API BACKEND</a:t>
             </a:r>
           </a:p>
           <a:p>
@@ -3424,14 +3424,14 @@
               <a:spcBef>
                 <a:spcPts val="800"/>
               </a:spcBef>
-              <a:defRPr sz="1600" b="1">
+              <a:defRPr sz="2000" b="1">
                 <a:solidFill>
                   <a:srgbClr val="0F172A"/>
                 </a:solidFill>
               </a:defRPr>
             </a:pPr>
             <a:r>
-              <a:t>FastAPI + AsyncIO</a:t>
+              <a:t>Python API</a:t>
             </a:r>
           </a:p>
           <a:p>
@@ -3439,14 +3439,14 @@
               <a:spcBef>
                 <a:spcPts val="400"/>
               </a:spcBef>
-              <a:defRPr sz="1100">
-                <a:solidFill>
-                  <a:srgbClr val="475569"/>
-                </a:solidFill>
-              </a:defRPr>
-            </a:pPr>
-            <a:r>
-              <a:t>Async SQLAlchemy 2.0 + Alembic</a:t>
+              <a:defRPr sz="1300">
+                <a:solidFill>
+                  <a:srgbClr val="64748B"/>
+                </a:solidFill>
+              </a:defRPr>
+            </a:pPr>
+            <a:r>
+              <a:t>Fast, modular &amp; async</a:t>
             </a:r>
           </a:p>
         </p:txBody>
@@ -3460,13 +3460,13 @@
         <p:spPr>
           <a:xfrm>
             <a:off x="3474720" y="4297680"/>
-            <a:ext cx="2468880" cy="1645920"/>
+            <a:ext cx="2468880" cy="1691640"/>
           </a:xfrm>
           <a:prstGeom prst="roundRect">
             <a:avLst/>
           </a:prstGeom>
           <a:solidFill>
-            <a:srgbClr val="FFFFFF"/>
+            <a:srgbClr val="F8FAFC"/>
           </a:solidFill>
           <a:ln w="19050">
             <a:solidFill>
@@ -3505,13 +3505,13 @@
         <p:spPr>
           <a:xfrm>
             <a:off x="3474720" y="4297680"/>
-            <a:ext cx="2468880" cy="73152"/>
+            <a:ext cx="2468880" cy="91440"/>
           </a:xfrm>
           <a:prstGeom prst="rect">
             <a:avLst/>
           </a:prstGeom>
           <a:solidFill>
-            <a:srgbClr val="B45309"/>
+            <a:srgbClr val="D97706"/>
           </a:solidFill>
           <a:ln>
             <a:noFill/>
@@ -3547,8 +3547,8 @@
         </p:nvSpPr>
         <p:spPr>
           <a:xfrm>
-            <a:off x="3657600" y="4434840"/>
-            <a:ext cx="2103120" cy="1371600"/>
+            <a:off x="3657600" y="4480560"/>
+            <a:ext cx="2103120" cy="1417320"/>
           </a:xfrm>
           <a:prstGeom prst="rect">
             <a:avLst/>
@@ -3562,14 +3562,14 @@
           <a:lstStyle/>
           <a:p>
             <a:pPr>
-              <a:defRPr sz="1100" b="1">
-                <a:solidFill>
-                  <a:srgbClr val="B45309"/>
-                </a:solidFill>
-              </a:defRPr>
-            </a:pPr>
-            <a:r>
-              <a:t>DATABASE</a:t>
+              <a:defRPr sz="1200" b="1">
+                <a:solidFill>
+                  <a:srgbClr val="D97706"/>
+                </a:solidFill>
+              </a:defRPr>
+            </a:pPr>
+            <a:r>
+              <a:t>DATA STORAGE</a:t>
             </a:r>
           </a:p>
           <a:p>
@@ -3577,14 +3577,14 @@
               <a:spcBef>
                 <a:spcPts val="800"/>
               </a:spcBef>
-              <a:defRPr sz="1600" b="1">
+              <a:defRPr sz="2000" b="1">
                 <a:solidFill>
                   <a:srgbClr val="0F172A"/>
                 </a:solidFill>
               </a:defRPr>
             </a:pPr>
             <a:r>
-              <a:t>PostgreSQL 16</a:t>
+              <a:t>SQL Database</a:t>
             </a:r>
           </a:p>
           <a:p>
@@ -3592,14 +3592,14 @@
               <a:spcBef>
                 <a:spcPts val="400"/>
               </a:spcBef>
-              <a:defRPr sz="1100">
-                <a:solidFill>
-                  <a:srgbClr val="475569"/>
-                </a:solidFill>
-              </a:defRPr>
-            </a:pPr>
-            <a:r>
-              <a:t>Normalized F&amp;B schema + Audit Logs</a:t>
+              <a:defRPr sz="1300">
+                <a:solidFill>
+                  <a:srgbClr val="64748B"/>
+                </a:solidFill>
+              </a:defRPr>
+            </a:pPr>
+            <a:r>
+              <a:t>Relational customer &amp; order data</a:t>
             </a:r>
           </a:p>
         </p:txBody>
@@ -3613,13 +3613,13 @@
         <p:spPr>
           <a:xfrm>
             <a:off x="6217920" y="4297680"/>
-            <a:ext cx="2468880" cy="1645920"/>
+            <a:ext cx="2468880" cy="1691640"/>
           </a:xfrm>
           <a:prstGeom prst="roundRect">
             <a:avLst/>
           </a:prstGeom>
           <a:solidFill>
-            <a:srgbClr val="FFFFFF"/>
+            <a:srgbClr val="F8FAFC"/>
           </a:solidFill>
           <a:ln w="19050">
             <a:solidFill>
@@ -3658,13 +3658,13 @@
         <p:spPr>
           <a:xfrm>
             <a:off x="6217920" y="4297680"/>
-            <a:ext cx="2468880" cy="73152"/>
+            <a:ext cx="2468880" cy="91440"/>
           </a:xfrm>
           <a:prstGeom prst="rect">
             <a:avLst/>
           </a:prstGeom>
           <a:solidFill>
-            <a:srgbClr val="4338CA"/>
+            <a:srgbClr val="4F46E5"/>
           </a:solidFill>
           <a:ln>
             <a:noFill/>
@@ -3700,8 +3700,8 @@
         </p:nvSpPr>
         <p:spPr>
           <a:xfrm>
-            <a:off x="6400800" y="4434840"/>
-            <a:ext cx="2103120" cy="1371600"/>
+            <a:off x="6400800" y="4480560"/>
+            <a:ext cx="2103120" cy="1417320"/>
           </a:xfrm>
           <a:prstGeom prst="rect">
             <a:avLst/>
@@ -3715,14 +3715,14 @@
           <a:lstStyle/>
           <a:p>
             <a:pPr>
-              <a:defRPr sz="1100" b="1">
-                <a:solidFill>
-                  <a:srgbClr val="4338CA"/>
-                </a:solidFill>
-              </a:defRPr>
-            </a:pPr>
-            <a:r>
-              <a:t>INFERENCE HUB</a:t>
+              <a:defRPr sz="1200" b="1">
+                <a:solidFill>
+                  <a:srgbClr val="4F46E5"/>
+                </a:solidFill>
+              </a:defRPr>
+            </a:pPr>
+            <a:r>
+              <a:t>AI ENGINE</a:t>
             </a:r>
           </a:p>
           <a:p>
@@ -3730,14 +3730,14 @@
               <a:spcBef>
                 <a:spcPts val="800"/>
               </a:spcBef>
-              <a:defRPr sz="1600" b="1">
+              <a:defRPr sz="2000" b="1">
                 <a:solidFill>
                   <a:srgbClr val="0F172A"/>
                 </a:solidFill>
               </a:defRPr>
             </a:pPr>
             <a:r>
-              <a:t>LangChain + Ollama</a:t>
+              <a:t>Smart AI Agent</a:t>
             </a:r>
           </a:p>
           <a:p>
@@ -3745,14 +3745,14 @@
               <a:spcBef>
                 <a:spcPts val="400"/>
               </a:spcBef>
-              <a:defRPr sz="1100">
-                <a:solidFill>
-                  <a:srgbClr val="475569"/>
-                </a:solidFill>
-              </a:defRPr>
-            </a:pPr>
-            <a:r>
-              <a:t>Zero-cost local fallback + Cloud LLM</a:t>
+              <a:defRPr sz="1300">
+                <a:solidFill>
+                  <a:srgbClr val="64748B"/>
+                </a:solidFill>
+              </a:defRPr>
+            </a:pPr>
+            <a:r>
+              <a:t>Interactive chat &amp; recommendations</a:t>
             </a:r>
           </a:p>
         </p:txBody>
@@ -3766,13 +3766,13 @@
         <p:spPr>
           <a:xfrm>
             <a:off x="8961120" y="4297680"/>
-            <a:ext cx="2468880" cy="1645920"/>
+            <a:ext cx="2468880" cy="1691640"/>
           </a:xfrm>
           <a:prstGeom prst="roundRect">
             <a:avLst/>
           </a:prstGeom>
           <a:solidFill>
-            <a:srgbClr val="FFFFFF"/>
+            <a:srgbClr val="F8FAFC"/>
           </a:solidFill>
           <a:ln w="19050">
             <a:solidFill>
@@ -3811,7 +3811,7 @@
         <p:spPr>
           <a:xfrm>
             <a:off x="8961120" y="4297680"/>
-            <a:ext cx="2468880" cy="73152"/>
+            <a:ext cx="2468880" cy="91440"/>
           </a:xfrm>
           <a:prstGeom prst="rect">
             <a:avLst/>
@@ -3853,8 +3853,8 @@
         </p:nvSpPr>
         <p:spPr>
           <a:xfrm>
-            <a:off x="9144000" y="4434840"/>
-            <a:ext cx="2103120" cy="1371600"/>
+            <a:off x="9144000" y="4480560"/>
+            <a:ext cx="2103120" cy="1417320"/>
           </a:xfrm>
           <a:prstGeom prst="rect">
             <a:avLst/>
@@ -3868,14 +3868,14 @@
           <a:lstStyle/>
           <a:p>
             <a:pPr>
-              <a:defRPr sz="1100" b="1">
+              <a:defRPr sz="1200" b="1">
                 <a:solidFill>
                   <a:srgbClr val="047857"/>
                 </a:solidFill>
               </a:defRPr>
             </a:pPr>
             <a:r>
-              <a:t>VERIFIED QUALITY</a:t>
+              <a:t>QUALITY</a:t>
             </a:r>
           </a:p>
           <a:p>
@@ -3883,14 +3883,14 @@
               <a:spcBef>
                 <a:spcPts val="800"/>
               </a:spcBef>
-              <a:defRPr sz="1600" b="1">
+              <a:defRPr sz="2000" b="1">
                 <a:solidFill>
                   <a:srgbClr val="0F172A"/>
                 </a:solidFill>
               </a:defRPr>
             </a:pPr>
             <a:r>
-              <a:t>73 / 73 Passed</a:t>
+              <a:t>100% Tests Passed</a:t>
             </a:r>
           </a:p>
           <a:p>
@@ -3898,14 +3898,14 @@
               <a:spcBef>
                 <a:spcPts val="400"/>
               </a:spcBef>
-              <a:defRPr sz="1100">
-                <a:solidFill>
-                  <a:srgbClr val="475569"/>
-                </a:solidFill>
-              </a:defRPr>
-            </a:pPr>
-            <a:r>
-              <a:t>100% test pass rate across 11 suites</a:t>
+              <a:defRPr sz="1300">
+                <a:solidFill>
+                  <a:srgbClr val="64748B"/>
+                </a:solidFill>
+              </a:defRPr>
+            </a:pPr>
+            <a:r>
+              <a:t>73 automated checks verified</a:t>
             </a:r>
           </a:p>
         </p:txBody>
@@ -3943,7 +3943,7 @@
             <a:avLst/>
           </a:prstGeom>
           <a:solidFill>
-            <a:srgbClr val="F8FAFC"/>
+            <a:srgbClr val="FFFFFF"/>
           </a:solidFill>
           <a:ln>
             <a:noFill/>
@@ -3994,14 +3994,14 @@
           <a:lstStyle/>
           <a:p>
             <a:pPr>
-              <a:defRPr sz="1000">
-                <a:solidFill>
-                  <a:srgbClr val="94A3B8"/>
-                </a:solidFill>
-              </a:defRPr>
-            </a:pPr>
-            <a:r>
-              <a:t>DrinkBot MLOps • TMA Solutions F&amp;B AI Workshop 2026 • Backend Architecture Review</a:t>
+              <a:defRPr sz="1100">
+                <a:solidFill>
+                  <a:srgbClr val="64748B"/>
+                </a:solidFill>
+              </a:defRPr>
+            </a:pPr>
+            <a:r>
+              <a:t>DrinkBot MLOps • F&amp;B AI Assistant &amp; Management Platform</a:t>
             </a:r>
           </a:p>
         </p:txBody>
@@ -4014,8 +4014,8 @@
         </p:nvSpPr>
         <p:spPr>
           <a:xfrm>
-            <a:off x="731520" y="384048"/>
-            <a:ext cx="2926080" cy="292608"/>
+            <a:off x="731520" y="365760"/>
+            <a:ext cx="2560320" cy="320040"/>
           </a:xfrm>
           <a:prstGeom prst="roundRect">
             <a:avLst/>
@@ -4048,14 +4048,14 @@
           <a:lstStyle/>
           <a:p>
             <a:pPr algn="ctr">
-              <a:defRPr sz="1000" b="1">
+              <a:defRPr sz="1100" b="1">
                 <a:solidFill>
                   <a:srgbClr val="78350F"/>
                 </a:solidFill>
               </a:defRPr>
             </a:pPr>
             <a:r>
-              <a:t>● STRATEGIC ROADMAP</a:t>
+              <a:t>FUTURE ROADMAP</a:t>
             </a:r>
           </a:p>
         </p:txBody>
@@ -4068,7 +4068,7 @@
         </p:nvSpPr>
         <p:spPr>
           <a:xfrm>
-            <a:off x="731520" y="713232"/>
+            <a:off x="731520" y="731520"/>
             <a:ext cx="10728655" cy="594360"/>
           </a:xfrm>
           <a:prstGeom prst="rect">
@@ -4083,14 +4083,14 @@
           <a:lstStyle/>
           <a:p>
             <a:pPr>
-              <a:defRPr sz="2600" b="1">
+              <a:defRPr sz="3200" b="1">
                 <a:solidFill>
                   <a:srgbClr val="0F172A"/>
                 </a:solidFill>
               </a:defRPr>
             </a:pPr>
             <a:r>
-              <a:t>Looking Forward: Priorities &amp; Open Q&amp;A Discussion</a:t>
+              <a:t>Strategic Roadmap &amp; Open Discussion</a:t>
             </a:r>
           </a:p>
         </p:txBody>
@@ -4103,8 +4103,8 @@
         </p:nvSpPr>
         <p:spPr>
           <a:xfrm>
-            <a:off x="731520" y="1298448"/>
-            <a:ext cx="10728655" cy="365760"/>
+            <a:off x="731520" y="1325880"/>
+            <a:ext cx="10728655" cy="411480"/>
           </a:xfrm>
           <a:prstGeom prst="rect">
             <a:avLst/>
@@ -4118,14 +4118,14 @@
           <a:lstStyle/>
           <a:p>
             <a:pPr>
-              <a:defRPr sz="1300">
-                <a:solidFill>
-                  <a:srgbClr val="475569"/>
-                </a:solidFill>
-              </a:defRPr>
-            </a:pPr>
-            <a:r>
-              <a:t>Closing the remaining architectural gaps and transitioning to full enterprise production.</a:t>
+              <a:defRPr sz="1500">
+                <a:solidFill>
+                  <a:srgbClr val="64748B"/>
+                </a:solidFill>
+              </a:defRPr>
+            </a:pPr>
+            <a:r>
+              <a:t>Clear priorities to achieve enterprise-ready beverage intelligence.</a:t>
             </a:r>
           </a:p>
         </p:txBody>
@@ -4145,7 +4145,7 @@
             <a:avLst/>
           </a:prstGeom>
           <a:solidFill>
-            <a:srgbClr val="FFFFFF"/>
+            <a:srgbClr val="F8FAFC"/>
           </a:solidFill>
           <a:ln w="19050">
             <a:solidFill>
@@ -4184,7 +4184,7 @@
         <p:spPr>
           <a:xfrm>
             <a:off x="731520" y="1828800"/>
-            <a:ext cx="3383280" cy="73152"/>
+            <a:ext cx="3383280" cy="91440"/>
           </a:xfrm>
           <a:prstGeom prst="rect">
             <a:avLst/>
@@ -4241,14 +4241,14 @@
           <a:lstStyle/>
           <a:p>
             <a:pPr>
-              <a:defRPr sz="1100" b="1">
+              <a:defRPr sz="1200" b="1">
                 <a:solidFill>
                   <a:srgbClr val="BE123C"/>
                 </a:solidFill>
               </a:defRPr>
             </a:pPr>
             <a:r>
-              <a:t>PRIORITY 1: CRITICAL GAP</a:t>
+              <a:t>PRIORITY 1: CLOUD</a:t>
             </a:r>
           </a:p>
           <a:p>
@@ -4256,59 +4256,59 @@
               <a:spcBef>
                 <a:spcPts val="400"/>
               </a:spcBef>
-              <a:defRPr sz="1500" b="1">
+              <a:defRPr sz="1700" b="1">
                 <a:solidFill>
                   <a:srgbClr val="0F172A"/>
                 </a:solidFill>
               </a:defRPr>
             </a:pPr>
             <a:r>
-              <a:t>AWS Bedrock via VPC Endpoint</a:t>
+              <a:t>Private Cloud AI Connection</a:t>
             </a:r>
           </a:p>
           <a:p>
             <a:pPr>
               <a:spcBef>
-                <a:spcPts val="800"/>
+                <a:spcPts val="1000"/>
               </a:spcBef>
-              <a:defRPr sz="1200">
+              <a:defRPr sz="1400">
                 <a:solidFill>
                   <a:srgbClr val="1E293B"/>
                 </a:solidFill>
               </a:defRPr>
             </a:pPr>
             <a:r>
-              <a:t>• Implement Boto3 AWS Bedrock client in llm.py for Claude 3 Haiku / Llama 3.</a:t>
+              <a:t>• Connect AI models through dedicated private cloud endpoints.</a:t>
             </a:r>
           </a:p>
           <a:p>
             <a:pPr>
               <a:spcBef>
-                <a:spcPts val="800"/>
+                <a:spcPts val="1000"/>
               </a:spcBef>
-              <a:defRPr sz="1200">
+              <a:defRPr sz="1400">
                 <a:solidFill>
                   <a:srgbClr val="1E293B"/>
                 </a:solidFill>
               </a:defRPr>
             </a:pPr>
             <a:r>
-              <a:t>• Configure VPC Endpoint routing to satisfy enterprise private network policies.</a:t>
+              <a:t>• Satisfy corporate network security standards without public internet exposure.</a:t>
             </a:r>
           </a:p>
           <a:p>
             <a:pPr>
               <a:spcBef>
-                <a:spcPts val="800"/>
+                <a:spcPts val="1000"/>
               </a:spcBef>
-              <a:defRPr sz="1200">
+              <a:defRPr sz="1400">
                 <a:solidFill>
                   <a:srgbClr val="1E293B"/>
                 </a:solidFill>
               </a:defRPr>
             </a:pPr>
             <a:r>
-              <a:t>• Eliminate external internet egress for cloud inference to meet mentor ask #1.</a:t>
+              <a:t>• Complete the remaining cloud infrastructure requirement.</a:t>
             </a:r>
           </a:p>
         </p:txBody>
@@ -4328,7 +4328,7 @@
             <a:avLst/>
           </a:prstGeom>
           <a:solidFill>
-            <a:srgbClr val="FFFFFF"/>
+            <a:srgbClr val="F8FAFC"/>
           </a:solidFill>
           <a:ln w="19050">
             <a:solidFill>
@@ -4367,13 +4367,13 @@
         <p:spPr>
           <a:xfrm>
             <a:off x="4389120" y="1828800"/>
-            <a:ext cx="3383280" cy="73152"/>
+            <a:ext cx="3383280" cy="91440"/>
           </a:xfrm>
           <a:prstGeom prst="rect">
             <a:avLst/>
           </a:prstGeom>
           <a:solidFill>
-            <a:srgbClr val="B45309"/>
+            <a:srgbClr val="D97706"/>
           </a:solidFill>
           <a:ln>
             <a:noFill/>
@@ -4424,14 +4424,14 @@
           <a:lstStyle/>
           <a:p>
             <a:pPr>
-              <a:defRPr sz="1100" b="1">
-                <a:solidFill>
-                  <a:srgbClr val="B45309"/>
-                </a:solidFill>
-              </a:defRPr>
-            </a:pPr>
-            <a:r>
-              <a:t>PRIORITY 2: ACCURACY FEEDBACK</a:t>
+              <a:defRPr sz="1200" b="1">
+                <a:solidFill>
+                  <a:srgbClr val="D97706"/>
+                </a:solidFill>
+              </a:defRPr>
+            </a:pPr>
+            <a:r>
+              <a:t>PRIORITY 2: FEEDBACK</a:t>
             </a:r>
           </a:p>
           <a:p>
@@ -4439,59 +4439,59 @@
               <a:spcBef>
                 <a:spcPts val="400"/>
               </a:spcBef>
-              <a:defRPr sz="1500" b="1">
+              <a:defRPr sz="1700" b="1">
                 <a:solidFill>
                   <a:srgbClr val="0F172A"/>
                 </a:solidFill>
               </a:defRPr>
             </a:pPr>
             <a:r>
-              <a:t>RLHF User Feedback Loop</a:t>
+              <a:t>Customer Rating Feedback</a:t>
             </a:r>
           </a:p>
           <a:p>
             <a:pPr>
               <a:spcBef>
-                <a:spcPts val="800"/>
+                <a:spcPts val="1000"/>
               </a:spcBef>
-              <a:defRPr sz="1200">
+              <a:defRPr sz="1400">
                 <a:solidFill>
                   <a:srgbClr val="1E293B"/>
                 </a:solidFill>
               </a:defRPr>
             </a:pPr>
             <a:r>
-              <a:t>• Add Thumbs Up / Down ratings on frontend messages to capture qualitative ground truth.</a:t>
+              <a:t>• Add simple Thumbs Up / Down buttons on chatbot messages.</a:t>
             </a:r>
           </a:p>
           <a:p>
             <a:pPr>
               <a:spcBef>
-                <a:spcPts val="800"/>
+                <a:spcPts val="1000"/>
               </a:spcBef>
-              <a:defRPr sz="1200">
+              <a:defRPr sz="1400">
                 <a:solidFill>
                   <a:srgbClr val="1E293B"/>
                 </a:solidFill>
               </a:defRPr>
             </a:pPr>
             <a:r>
-              <a:t>• Synchronize feedback scores to Langfuse to automate model evaluation datasets.</a:t>
+              <a:t>• Gather direct customer feedback on drink suggestions.</a:t>
             </a:r>
           </a:p>
           <a:p>
             <a:pPr>
               <a:spcBef>
-                <a:spcPts val="800"/>
+                <a:spcPts val="1000"/>
               </a:spcBef>
-              <a:defRPr sz="1200">
+              <a:defRPr sz="1400">
                 <a:solidFill>
                   <a:srgbClr val="1E293B"/>
                 </a:solidFill>
               </a:defRPr>
             </a:pPr>
             <a:r>
-              <a:t>• Complete requirement #3 by actively tracking response quality over time.</a:t>
+              <a:t>• Build automated quality datasets to continuously improve responses.</a:t>
             </a:r>
           </a:p>
         </p:txBody>
@@ -4511,7 +4511,7 @@
             <a:avLst/>
           </a:prstGeom>
           <a:solidFill>
-            <a:srgbClr val="FFFFFF"/>
+            <a:srgbClr val="F8FAFC"/>
           </a:solidFill>
           <a:ln w="19050">
             <a:solidFill>
@@ -4550,13 +4550,13 @@
         <p:spPr>
           <a:xfrm>
             <a:off x="8046720" y="1828800"/>
-            <a:ext cx="3383280" cy="73152"/>
+            <a:ext cx="3383280" cy="91440"/>
           </a:xfrm>
           <a:prstGeom prst="rect">
             <a:avLst/>
           </a:prstGeom>
           <a:solidFill>
-            <a:srgbClr val="4338CA"/>
+            <a:srgbClr val="4F46E5"/>
           </a:solidFill>
           <a:ln>
             <a:noFill/>
@@ -4607,9 +4607,9 @@
           <a:lstStyle/>
           <a:p>
             <a:pPr>
-              <a:defRPr sz="1100" b="1">
-                <a:solidFill>
-                  <a:srgbClr val="4338CA"/>
+              <a:defRPr sz="1200" b="1">
+                <a:solidFill>
+                  <a:srgbClr val="4F46E5"/>
                 </a:solidFill>
               </a:defRPr>
             </a:pPr>
@@ -4622,59 +4622,59 @@
               <a:spcBef>
                 <a:spcPts val="400"/>
               </a:spcBef>
-              <a:defRPr sz="1500" b="1">
+              <a:defRPr sz="1700" b="1">
                 <a:solidFill>
                   <a:srgbClr val="0F172A"/>
                 </a:solidFill>
               </a:defRPr>
             </a:pPr>
             <a:r>
-              <a:t>Continuous Auto-Retraining</a:t>
+              <a:t>Continuous Model Updates</a:t>
             </a:r>
           </a:p>
           <a:p>
             <a:pPr>
               <a:spcBef>
-                <a:spcPts val="800"/>
+                <a:spcPts val="1000"/>
               </a:spcBef>
-              <a:defRPr sz="1200">
+              <a:defRPr sz="1400">
                 <a:solidFill>
                   <a:srgbClr val="1E293B"/>
                 </a:solidFill>
               </a:defRPr>
             </a:pPr>
             <a:r>
-              <a:t>• Trigger automatic fine-tuning when newly verified customer conversations reach thresholds.</a:t>
+              <a:t>• Automatically retrain models as new seasonal drinks are added.</a:t>
             </a:r>
           </a:p>
           <a:p>
             <a:pPr>
               <a:spcBef>
-                <a:spcPts val="800"/>
+                <a:spcPts val="1000"/>
               </a:spcBef>
-              <a:defRPr sz="1200">
+              <a:defRPr sz="1400">
                 <a:solidFill>
                   <a:srgbClr val="1E293B"/>
                 </a:solidFill>
               </a:defRPr>
             </a:pPr>
             <a:r>
-              <a:t>• Execute regression test suites (73 tests) before promoting candidate checkpoints.</a:t>
+              <a:t>• Run 73 automated quality tests before releasing new models.</a:t>
             </a:r>
           </a:p>
           <a:p>
             <a:pPr>
               <a:spcBef>
-                <a:spcPts val="800"/>
+                <a:spcPts val="1000"/>
               </a:spcBef>
-              <a:defRPr sz="1200">
+              <a:defRPr sz="1400">
                 <a:solidFill>
                   <a:srgbClr val="1E293B"/>
                 </a:solidFill>
               </a:defRPr>
             </a:pPr>
             <a:r>
-              <a:t>• Automate canary deployments for zero-downtime model upgrades.</a:t>
+              <a:t>• Ensure zero downtime when rolling out improved AI models.</a:t>
             </a:r>
           </a:p>
         </p:txBody>
@@ -4747,14 +4747,14 @@
           <a:lstStyle/>
           <a:p>
             <a:pPr algn="ctr">
-              <a:defRPr sz="2000" b="1">
+              <a:defRPr sz="2200" b="1">
                 <a:solidFill>
                   <a:srgbClr val="78350F"/>
                 </a:solidFill>
               </a:defRPr>
             </a:pPr>
             <a:r>
-              <a:t>☕ THANK YOU FOR YOUR TIME &amp; ATTENTION!</a:t>
+              <a:t>☕ THANK YOU FOR YOUR TIME!</a:t>
             </a:r>
           </a:p>
           <a:p>
@@ -4762,14 +4762,14 @@
               <a:spcBef>
                 <a:spcPts val="400"/>
               </a:spcBef>
-              <a:defRPr sz="1300">
-                <a:solidFill>
-                  <a:srgbClr val="475569"/>
-                </a:solidFill>
-              </a:defRPr>
-            </a:pPr>
-            <a:r>
-              <a:t>DrinkBot MLOps Backend Team — Open for Technical Q&amp;A and Architectural Discussion</a:t>
+              <a:defRPr sz="1500">
+                <a:solidFill>
+                  <a:srgbClr val="1E293B"/>
+                </a:solidFill>
+              </a:defRPr>
+            </a:pPr>
+            <a:r>
+              <a:t>DrinkBot MLOps — Open for Questions &amp; Technical Discussion</a:t>
             </a:r>
           </a:p>
         </p:txBody>
@@ -4807,7 +4807,7 @@
             <a:avLst/>
           </a:prstGeom>
           <a:solidFill>
-            <a:srgbClr val="F8FAFC"/>
+            <a:srgbClr val="FFFFFF"/>
           </a:solidFill>
           <a:ln>
             <a:noFill/>
@@ -4858,14 +4858,14 @@
           <a:lstStyle/>
           <a:p>
             <a:pPr>
-              <a:defRPr sz="1000">
-                <a:solidFill>
-                  <a:srgbClr val="94A3B8"/>
-                </a:solidFill>
-              </a:defRPr>
-            </a:pPr>
-            <a:r>
-              <a:t>DrinkBot MLOps • TMA Solutions F&amp;B AI Workshop 2026 • Backend Architecture Review</a:t>
+              <a:defRPr sz="1100">
+                <a:solidFill>
+                  <a:srgbClr val="64748B"/>
+                </a:solidFill>
+              </a:defRPr>
+            </a:pPr>
+            <a:r>
+              <a:t>DrinkBot MLOps • F&amp;B AI Assistant &amp; Management Platform</a:t>
             </a:r>
           </a:p>
         </p:txBody>
@@ -4878,8 +4878,8 @@
         </p:nvSpPr>
         <p:spPr>
           <a:xfrm>
-            <a:off x="731520" y="384048"/>
-            <a:ext cx="2926080" cy="292608"/>
+            <a:off x="731520" y="365760"/>
+            <a:ext cx="2560320" cy="320040"/>
           </a:xfrm>
           <a:prstGeom prst="roundRect">
             <a:avLst/>
@@ -4912,14 +4912,14 @@
           <a:lstStyle/>
           <a:p>
             <a:pPr algn="ctr">
-              <a:defRPr sz="1000" b="1">
+              <a:defRPr sz="1100" b="1">
                 <a:solidFill>
                   <a:srgbClr val="78350F"/>
                 </a:solidFill>
               </a:defRPr>
             </a:pPr>
             <a:r>
-              <a:t>● EXECUTIVE STRATEGY</a:t>
+              <a:t>GOALS &amp; SCOPE</a:t>
             </a:r>
           </a:p>
         </p:txBody>
@@ -4932,7 +4932,7 @@
         </p:nvSpPr>
         <p:spPr>
           <a:xfrm>
-            <a:off x="731520" y="713232"/>
+            <a:off x="731520" y="731520"/>
             <a:ext cx="10728655" cy="594360"/>
           </a:xfrm>
           <a:prstGeom prst="rect">
@@ -4947,14 +4947,14 @@
           <a:lstStyle/>
           <a:p>
             <a:pPr>
-              <a:defRPr sz="2600" b="1">
+              <a:defRPr sz="3200" b="1">
                 <a:solidFill>
                   <a:srgbClr val="0F172A"/>
                 </a:solidFill>
               </a:defRPr>
             </a:pPr>
             <a:r>
-              <a:t>Workshop Brief Objectives &amp; Section Goals</a:t>
+              <a:t>Project Goals &amp; Evaluation Strategy</a:t>
             </a:r>
           </a:p>
         </p:txBody>
@@ -4967,8 +4967,8 @@
         </p:nvSpPr>
         <p:spPr>
           <a:xfrm>
-            <a:off x="731520" y="1298448"/>
-            <a:ext cx="10728655" cy="365760"/>
+            <a:off x="731520" y="1325880"/>
+            <a:ext cx="10728655" cy="411480"/>
           </a:xfrm>
           <a:prstGeom prst="rect">
             <a:avLst/>
@@ -4982,14 +4982,14 @@
           <a:lstStyle/>
           <a:p>
             <a:pPr>
-              <a:defRPr sz="1300">
-                <a:solidFill>
-                  <a:srgbClr val="475569"/>
-                </a:solidFill>
-              </a:defRPr>
-            </a:pPr>
-            <a:r>
-              <a:t>A transparent status update aligning technical deliverables with workshop requirements.</a:t>
+              <a:defRPr sz="1500">
+                <a:solidFill>
+                  <a:srgbClr val="64748B"/>
+                </a:solidFill>
+              </a:defRPr>
+            </a:pPr>
+            <a:r>
+              <a:t>Balancing consumer-facing drink service with enterprise MLOps standards.</a:t>
             </a:r>
           </a:p>
         </p:txBody>
@@ -5009,7 +5009,7 @@
             <a:avLst/>
           </a:prstGeom>
           <a:solidFill>
-            <a:srgbClr val="FFFFFF"/>
+            <a:srgbClr val="F8FAFC"/>
           </a:solidFill>
           <a:ln w="19050">
             <a:solidFill>
@@ -5054,7 +5054,7 @@
             <a:avLst/>
           </a:prstGeom>
           <a:solidFill>
-            <a:srgbClr val="B45309"/>
+            <a:srgbClr val="D97706"/>
           </a:solidFill>
           <a:ln>
             <a:noFill/>
@@ -5105,95 +5105,95 @@
           <a:lstStyle/>
           <a:p>
             <a:pPr>
-              <a:defRPr sz="1800" b="1">
-                <a:solidFill>
-                  <a:srgbClr val="B45309"/>
-                </a:solidFill>
-              </a:defRPr>
-            </a:pPr>
-            <a:r>
-              <a:t>Core F&amp;B Delivery</a:t>
+              <a:defRPr sz="2200" b="1">
+                <a:solidFill>
+                  <a:srgbClr val="D97706"/>
+                </a:solidFill>
+              </a:defRPr>
+            </a:pPr>
+            <a:r>
+              <a:t>Smart Beverage Service</a:t>
             </a:r>
           </a:p>
           <a:p>
             <a:pPr>
               <a:spcBef>
-                <a:spcPts val="1200"/>
+                <a:spcPts val="1400"/>
               </a:spcBef>
-              <a:defRPr sz="1400" b="1">
+              <a:defRPr sz="1600" b="1">
                 <a:solidFill>
                   <a:srgbClr val="0F172A"/>
                 </a:solidFill>
               </a:defRPr>
             </a:pPr>
             <a:r>
-              <a:t>• Entity Collection</a:t>
-            </a:r>
-          </a:p>
-          <a:p>
-            <a:pPr>
-              <a:defRPr sz="1200">
-                <a:solidFill>
-                  <a:srgbClr val="475569"/>
-                </a:solidFill>
-              </a:defRPr>
-            </a:pPr>
-            <a:r>
-              <a:t>   Captures user name, phone, delivery address with strict VN phone validation.</a:t>
+              <a:t>• Customer Information:</a:t>
+            </a:r>
+          </a:p>
+          <a:p>
+            <a:pPr>
+              <a:defRPr sz="1400">
+                <a:solidFill>
+                  <a:srgbClr val="1E293B"/>
+                </a:solidFill>
+              </a:defRPr>
+            </a:pPr>
+            <a:r>
+              <a:t>   Captures customer name, phone number, and delivery address.</a:t>
             </a:r>
           </a:p>
           <a:p>
             <a:pPr>
               <a:spcBef>
-                <a:spcPts val="1200"/>
+                <a:spcPts val="1400"/>
               </a:spcBef>
-              <a:defRPr sz="1400" b="1">
+              <a:defRPr sz="1600" b="1">
                 <a:solidFill>
                   <a:srgbClr val="0F172A"/>
                 </a:solidFill>
               </a:defRPr>
             </a:pPr>
             <a:r>
-              <a:t>• Category Coverage</a:t>
-            </a:r>
-          </a:p>
-          <a:p>
-            <a:pPr>
-              <a:defRPr sz="1200">
-                <a:solidFill>
-                  <a:srgbClr val="475569"/>
-                </a:solidFill>
-              </a:defRPr>
-            </a:pPr>
-            <a:r>
-              <a:t>   Recommends Detox, Coffee, and Protein drinks alongside teas and fruit juices.</a:t>
+              <a:t>• Diverse Drink Menu:</a:t>
+            </a:r>
+          </a:p>
+          <a:p>
+            <a:pPr>
+              <a:defRPr sz="1400">
+                <a:solidFill>
+                  <a:srgbClr val="1E293B"/>
+                </a:solidFill>
+              </a:defRPr>
+            </a:pPr>
+            <a:r>
+              <a:t>   Recommends Coffee, Detox teas, Protein shakes, and Juices.</a:t>
             </a:r>
           </a:p>
           <a:p>
             <a:pPr>
               <a:spcBef>
-                <a:spcPts val="1200"/>
+                <a:spcPts val="1400"/>
               </a:spcBef>
-              <a:defRPr sz="1400" b="1">
+              <a:defRPr sz="1600" b="1">
                 <a:solidFill>
                   <a:srgbClr val="0F172A"/>
                 </a:solidFill>
               </a:defRPr>
             </a:pPr>
             <a:r>
-              <a:t>• Safe Persistence</a:t>
-            </a:r>
-          </a:p>
-          <a:p>
-            <a:pPr>
-              <a:defRPr sz="1200">
-                <a:solidFill>
-                  <a:srgbClr val="475569"/>
-                </a:solidFill>
-              </a:defRPr>
-            </a:pPr>
-            <a:r>
-              <a:t>   Relational persistence with full preference profiling in PostgreSQL.</a:t>
+              <a:t>• Preference Memory:</a:t>
+            </a:r>
+          </a:p>
+          <a:p>
+            <a:pPr>
+              <a:defRPr sz="1400">
+                <a:solidFill>
+                  <a:srgbClr val="1E293B"/>
+                </a:solidFill>
+              </a:defRPr>
+            </a:pPr>
+            <a:r>
+              <a:t>   Remembers taste preferences, sweetness, ice level, and allergies.</a:t>
             </a:r>
           </a:p>
         </p:txBody>
@@ -5213,7 +5213,7 @@
             <a:avLst/>
           </a:prstGeom>
           <a:solidFill>
-            <a:srgbClr val="FFFFFF"/>
+            <a:srgbClr val="F8FAFC"/>
           </a:solidFill>
           <a:ln w="19050">
             <a:solidFill>
@@ -5309,7 +5309,7 @@
           <a:lstStyle/>
           <a:p>
             <a:pPr>
-              <a:defRPr sz="1800" b="1">
+              <a:defRPr sz="2200" b="1">
                 <a:solidFill>
                   <a:srgbClr val="0284C7"/>
                 </a:solidFill>
@@ -5322,82 +5322,82 @@
           <a:p>
             <a:pPr>
               <a:spcBef>
-                <a:spcPts val="1200"/>
+                <a:spcPts val="1400"/>
               </a:spcBef>
-              <a:defRPr sz="1400" b="1">
+              <a:defRPr sz="1600" b="1">
                 <a:solidFill>
                   <a:srgbClr val="0F172A"/>
                 </a:solidFill>
               </a:defRPr>
             </a:pPr>
             <a:r>
-              <a:t>• Prompt Lifecycle</a:t>
-            </a:r>
-          </a:p>
-          <a:p>
-            <a:pPr>
-              <a:defRPr sz="1200">
-                <a:solidFill>
-                  <a:srgbClr val="475569"/>
-                </a:solidFill>
-              </a:defRPr>
-            </a:pPr>
-            <a:r>
-              <a:t>   Database-backed PromptVersion store with semantic versions and SHA-256 hashes.</a:t>
+              <a:t>• Prompt Versioning:</a:t>
+            </a:r>
+          </a:p>
+          <a:p>
+            <a:pPr>
+              <a:defRPr sz="1400">
+                <a:solidFill>
+                  <a:srgbClr val="1E293B"/>
+                </a:solidFill>
+              </a:defRPr>
+            </a:pPr>
+            <a:r>
+              <a:t>   Prompts managed in database with one-click rollback.</a:t>
             </a:r>
           </a:p>
           <a:p>
             <a:pPr>
               <a:spcBef>
-                <a:spcPts val="1200"/>
+                <a:spcPts val="1400"/>
               </a:spcBef>
-              <a:defRPr sz="1400" b="1">
+              <a:defRPr sz="1600" b="1">
                 <a:solidFill>
                   <a:srgbClr val="0F172A"/>
                 </a:solidFill>
               </a:defRPr>
             </a:pPr>
             <a:r>
-              <a:t>• Observability</a:t>
-            </a:r>
-          </a:p>
-          <a:p>
-            <a:pPr>
-              <a:defRPr sz="1200">
-                <a:solidFill>
-                  <a:srgbClr val="475569"/>
-                </a:solidFill>
-              </a:defRPr>
-            </a:pPr>
-            <a:r>
-              <a:t>   Structured JSON logging capturing latency, token usage, and cost per message.</a:t>
+              <a:t>• Full Telemetry:</a:t>
+            </a:r>
+          </a:p>
+          <a:p>
+            <a:pPr>
+              <a:defRPr sz="1400">
+                <a:solidFill>
+                  <a:srgbClr val="1E293B"/>
+                </a:solidFill>
+              </a:defRPr>
+            </a:pPr>
+            <a:r>
+              <a:t>   Monitors AI cost, token usage, and response latency per message.</a:t>
             </a:r>
           </a:p>
           <a:p>
             <a:pPr>
               <a:spcBef>
-                <a:spcPts val="1200"/>
+                <a:spcPts val="1400"/>
               </a:spcBef>
-              <a:defRPr sz="1400" b="1">
+              <a:defRPr sz="1600" b="1">
                 <a:solidFill>
                   <a:srgbClr val="0F172A"/>
                 </a:solidFill>
               </a:defRPr>
             </a:pPr>
             <a:r>
-              <a:t>• Model Experimentation</a:t>
-            </a:r>
-          </a:p>
-          <a:p>
-            <a:pPr>
-              <a:defRPr sz="1200">
-                <a:solidFill>
-                  <a:srgbClr val="475569"/>
-                </a:solidFill>
-              </a:defRPr>
-            </a:pPr>
-            <a:r>
-              <a:t>   Centralized Model Registry with local Gemma-2B LoRA fine-tuning &amp; RAG adapter.</a:t>
+              <a:t>• Custom AI Models:</a:t>
+            </a:r>
+          </a:p>
+          <a:p>
+            <a:pPr>
+              <a:defRPr sz="1400">
+                <a:solidFill>
+                  <a:srgbClr val="1E293B"/>
+                </a:solidFill>
+              </a:defRPr>
+            </a:pPr>
+            <a:r>
+              <a:t>   Trained models tailored specifically for drink ordering.</a:t>
             </a:r>
           </a:p>
         </p:txBody>
@@ -5417,7 +5417,7 @@
             <a:avLst/>
           </a:prstGeom>
           <a:solidFill>
-            <a:srgbClr val="FFFFFF"/>
+            <a:srgbClr val="F8FAFC"/>
           </a:solidFill>
           <a:ln w="19050">
             <a:solidFill>
@@ -5513,95 +5513,95 @@
           <a:lstStyle/>
           <a:p>
             <a:pPr>
-              <a:defRPr sz="1800" b="1">
+              <a:defRPr sz="2200" b="1">
                 <a:solidFill>
                   <a:srgbClr val="BE123C"/>
                 </a:solidFill>
               </a:defRPr>
             </a:pPr>
             <a:r>
-              <a:t>Objective Transparency</a:t>
+              <a:t>Transparent Status</a:t>
             </a:r>
           </a:p>
           <a:p>
             <a:pPr>
               <a:spcBef>
-                <a:spcPts val="1200"/>
+                <a:spcPts val="1400"/>
               </a:spcBef>
-              <a:defRPr sz="1400" b="1">
+              <a:defRPr sz="1600" b="1">
                 <a:solidFill>
                   <a:srgbClr val="0F172A"/>
                 </a:solidFill>
               </a:defRPr>
             </a:pPr>
             <a:r>
-              <a:t>• Verified Done</a:t>
-            </a:r>
-          </a:p>
-          <a:p>
-            <a:pPr>
-              <a:defRPr sz="1200">
-                <a:solidFill>
-                  <a:srgbClr val="475569"/>
-                </a:solidFill>
-              </a:defRPr>
-            </a:pPr>
-            <a:r>
-              <a:t>   Core chatbot, guardrails, Dockerization, and prompt versioning are 100% complete.</a:t>
+              <a:t>• Core Service: 100% Done:</a:t>
+            </a:r>
+          </a:p>
+          <a:p>
+            <a:pPr>
+              <a:defRPr sz="1400">
+                <a:solidFill>
+                  <a:srgbClr val="1E293B"/>
+                </a:solidFill>
+              </a:defRPr>
+            </a:pPr>
+            <a:r>
+              <a:t>   Chatbot, allergy safety, and database storage fully operating.</a:t>
             </a:r>
           </a:p>
           <a:p>
             <a:pPr>
               <a:spcBef>
-                <a:spcPts val="1200"/>
+                <a:spcPts val="1400"/>
               </a:spcBef>
-              <a:defRPr sz="1400" b="1">
+              <a:defRPr sz="1600" b="1">
                 <a:solidFill>
                   <a:srgbClr val="0F172A"/>
                 </a:solidFill>
               </a:defRPr>
             </a:pPr>
             <a:r>
-              <a:t>• Partial Capability</a:t>
-            </a:r>
-          </a:p>
-          <a:p>
-            <a:pPr>
-              <a:defRPr sz="1200">
-                <a:solidFill>
-                  <a:srgbClr val="475569"/>
-                </a:solidFill>
-              </a:defRPr>
-            </a:pPr>
-            <a:r>
-              <a:t>   Full chat telemetry stored; user feedback rating (like/dislike) is pending.</a:t>
+              <a:t>• Continuous Tracking:</a:t>
+            </a:r>
+          </a:p>
+          <a:p>
+            <a:pPr>
+              <a:defRPr sz="1400">
+                <a:solidFill>
+                  <a:srgbClr val="1E293B"/>
+                </a:solidFill>
+              </a:defRPr>
+            </a:pPr>
+            <a:r>
+              <a:t>   All conversation history and operational costs recorded.</a:t>
             </a:r>
           </a:p>
           <a:p>
             <a:pPr>
               <a:spcBef>
-                <a:spcPts val="1200"/>
+                <a:spcPts val="1400"/>
               </a:spcBef>
-              <a:defRPr sz="1400" b="1">
+              <a:defRPr sz="1600" b="1">
                 <a:solidFill>
                   <a:srgbClr val="0F172A"/>
                 </a:solidFill>
               </a:defRPr>
             </a:pPr>
             <a:r>
-              <a:t>• Key Architectural Gap</a:t>
-            </a:r>
-          </a:p>
-          <a:p>
-            <a:pPr>
-              <a:defRPr sz="1200">
-                <a:solidFill>
-                  <a:srgbClr val="475569"/>
-                </a:solidFill>
-              </a:defRPr>
-            </a:pPr>
-            <a:r>
-              <a:t>   AWS Bedrock via VPC Endpoint is not started (currently direct OpenAI/Ollama).</a:t>
+              <a:t>• Next Cloud Step:</a:t>
+            </a:r>
+          </a:p>
+          <a:p>
+            <a:pPr>
+              <a:defRPr sz="1400">
+                <a:solidFill>
+                  <a:srgbClr val="1E293B"/>
+                </a:solidFill>
+              </a:defRPr>
+            </a:pPr>
+            <a:r>
+              <a:t>   Currently using direct Cloud AI; Private Cloud integration is next.</a:t>
             </a:r>
           </a:p>
         </p:txBody>
@@ -5639,7 +5639,7 @@
             <a:avLst/>
           </a:prstGeom>
           <a:solidFill>
-            <a:srgbClr val="F8FAFC"/>
+            <a:srgbClr val="FFFFFF"/>
           </a:solidFill>
           <a:ln>
             <a:noFill/>
@@ -5690,14 +5690,14 @@
           <a:lstStyle/>
           <a:p>
             <a:pPr>
-              <a:defRPr sz="1000">
-                <a:solidFill>
-                  <a:srgbClr val="94A3B8"/>
-                </a:solidFill>
-              </a:defRPr>
-            </a:pPr>
-            <a:r>
-              <a:t>DrinkBot MLOps • TMA Solutions F&amp;B AI Workshop 2026 • Backend Architecture Review</a:t>
+              <a:defRPr sz="1100">
+                <a:solidFill>
+                  <a:srgbClr val="64748B"/>
+                </a:solidFill>
+              </a:defRPr>
+            </a:pPr>
+            <a:r>
+              <a:t>DrinkBot MLOps • F&amp;B AI Assistant &amp; Management Platform</a:t>
             </a:r>
           </a:p>
         </p:txBody>
@@ -5710,8 +5710,8 @@
         </p:nvSpPr>
         <p:spPr>
           <a:xfrm>
-            <a:off x="731520" y="384048"/>
-            <a:ext cx="2926080" cy="292608"/>
+            <a:off x="731520" y="365760"/>
+            <a:ext cx="2560320" cy="320040"/>
           </a:xfrm>
           <a:prstGeom prst="roundRect">
             <a:avLst/>
@@ -5744,14 +5744,14 @@
           <a:lstStyle/>
           <a:p>
             <a:pPr algn="ctr">
-              <a:defRPr sz="1000" b="1">
+              <a:defRPr sz="1100" b="1">
                 <a:solidFill>
                   <a:srgbClr val="78350F"/>
                 </a:solidFill>
               </a:defRPr>
             </a:pPr>
             <a:r>
-              <a:t>● SYSTEM ARCHITECTURE</a:t>
+              <a:t>ARCHITECTURE</a:t>
             </a:r>
           </a:p>
         </p:txBody>
@@ -5764,7 +5764,7 @@
         </p:nvSpPr>
         <p:spPr>
           <a:xfrm>
-            <a:off x="731520" y="713232"/>
+            <a:off x="731520" y="731520"/>
             <a:ext cx="10728655" cy="594360"/>
           </a:xfrm>
           <a:prstGeom prst="rect">
@@ -5779,14 +5779,14 @@
           <a:lstStyle/>
           <a:p>
             <a:pPr>
-              <a:defRPr sz="2600" b="1">
+              <a:defRPr sz="3200" b="1">
                 <a:solidFill>
                   <a:srgbClr val="0F172A"/>
                 </a:solidFill>
               </a:defRPr>
             </a:pPr>
             <a:r>
-              <a:t>High-Throughput Asynchronous Backend Stack</a:t>
+              <a:t>System Architecture &amp; Core Infrastructure</a:t>
             </a:r>
           </a:p>
         </p:txBody>
@@ -5799,8 +5799,8 @@
         </p:nvSpPr>
         <p:spPr>
           <a:xfrm>
-            <a:off x="731520" y="1298448"/>
-            <a:ext cx="10728655" cy="365760"/>
+            <a:off x="731520" y="1325880"/>
+            <a:ext cx="10728655" cy="411480"/>
           </a:xfrm>
           <a:prstGeom prst="rect">
             <a:avLst/>
@@ -5814,14 +5814,14 @@
           <a:lstStyle/>
           <a:p>
             <a:pPr>
-              <a:defRPr sz="1300">
-                <a:solidFill>
-                  <a:srgbClr val="475569"/>
-                </a:solidFill>
-              </a:defRPr>
-            </a:pPr>
-            <a:r>
-              <a:t>Modular, async-first architecture designed for resilience, observability, and scale.</a:t>
+              <a:defRPr sz="1500">
+                <a:solidFill>
+                  <a:srgbClr val="64748B"/>
+                </a:solidFill>
+              </a:defRPr>
+            </a:pPr>
+            <a:r>
+              <a:t>Modular and reliable foundation built for speed, safety, and scalability.</a:t>
             </a:r>
           </a:p>
         </p:txBody>
@@ -5841,7 +5841,7 @@
             <a:avLst/>
           </a:prstGeom>
           <a:solidFill>
-            <a:srgbClr val="FFFFFF"/>
+            <a:srgbClr val="F8FAFC"/>
           </a:solidFill>
           <a:ln w="19050">
             <a:solidFill>
@@ -5880,13 +5880,13 @@
         <p:spPr>
           <a:xfrm>
             <a:off x="731520" y="1828800"/>
-            <a:ext cx="2468880" cy="73152"/>
+            <a:ext cx="2468880" cy="91440"/>
           </a:xfrm>
           <a:prstGeom prst="rect">
             <a:avLst/>
           </a:prstGeom>
           <a:solidFill>
-            <a:srgbClr val="B45309"/>
+            <a:srgbClr val="0284C7"/>
           </a:solidFill>
           <a:ln>
             <a:noFill/>
@@ -5922,8 +5922,8 @@
         </p:nvSpPr>
         <p:spPr>
           <a:xfrm>
-            <a:off x="914400" y="1965960"/>
-            <a:ext cx="2103120" cy="4023360"/>
+            <a:off x="914400" y="2011680"/>
+            <a:ext cx="2103120" cy="3931920"/>
           </a:xfrm>
           <a:prstGeom prst="rect">
             <a:avLst/>
@@ -5937,14 +5937,14 @@
           <a:lstStyle/>
           <a:p>
             <a:pPr>
-              <a:defRPr sz="1100" b="1">
-                <a:solidFill>
-                  <a:srgbClr val="B45309"/>
-                </a:solidFill>
-              </a:defRPr>
-            </a:pPr>
-            <a:r>
-              <a:t>API LAYER</a:t>
+              <a:defRPr sz="1200" b="1">
+                <a:solidFill>
+                  <a:srgbClr val="0284C7"/>
+                </a:solidFill>
+              </a:defRPr>
+            </a:pPr>
+            <a:r>
+              <a:t>API BACKEND</a:t>
             </a:r>
           </a:p>
           <a:p>
@@ -5952,74 +5952,74 @@
               <a:spcBef>
                 <a:spcPts val="400"/>
               </a:spcBef>
-              <a:defRPr sz="1600" b="1">
+              <a:defRPr sz="1800" b="1">
                 <a:solidFill>
                   <a:srgbClr val="0F172A"/>
                 </a:solidFill>
               </a:defRPr>
             </a:pPr>
             <a:r>
-              <a:t>FastAPI + Uvicorn</a:t>
+              <a:t>Python Web API</a:t>
             </a:r>
           </a:p>
           <a:p>
             <a:pPr>
               <a:spcBef>
-                <a:spcPts val="1000"/>
+                <a:spcPts val="1200"/>
               </a:spcBef>
-              <a:defRPr sz="1200">
+              <a:defRPr sz="1400">
                 <a:solidFill>
                   <a:srgbClr val="1E293B"/>
                 </a:solidFill>
               </a:defRPr>
             </a:pPr>
             <a:r>
-              <a:t>✔ Non-blocking async request handlers</a:t>
+              <a:t>✔ High-speed async request processing</a:t>
             </a:r>
           </a:p>
           <a:p>
             <a:pPr>
               <a:spcBef>
-                <a:spcPts val="1000"/>
+                <a:spcPts val="1200"/>
               </a:spcBef>
-              <a:defRPr sz="1200">
+              <a:defRPr sz="1400">
                 <a:solidFill>
                   <a:srgbClr val="1E293B"/>
                 </a:solidFill>
               </a:defRPr>
             </a:pPr>
             <a:r>
-              <a:t>✔ Pydantic v2 schemas &amp; validations</a:t>
+              <a:t>✔ Secure phone-based customer login</a:t>
             </a:r>
           </a:p>
           <a:p>
             <a:pPr>
               <a:spcBef>
-                <a:spcPts val="1000"/>
+                <a:spcPts val="1200"/>
               </a:spcBef>
-              <a:defRPr sz="1200">
+              <a:defRPr sz="1400">
                 <a:solidFill>
                   <a:srgbClr val="1E293B"/>
                 </a:solidFill>
               </a:defRPr>
             </a:pPr>
             <a:r>
-              <a:t>✔ Simplified phone-based JWT authentication</a:t>
+              <a:t>✔ Clean API endpoints for chat and menu</a:t>
             </a:r>
           </a:p>
           <a:p>
             <a:pPr>
               <a:spcBef>
-                <a:spcPts val="1000"/>
+                <a:spcPts val="1200"/>
               </a:spcBef>
-              <a:defRPr sz="1200">
+              <a:defRPr sz="1400">
                 <a:solidFill>
                   <a:srgbClr val="1E293B"/>
                 </a:solidFill>
               </a:defRPr>
             </a:pPr>
             <a:r>
-              <a:t>✔ 6 REST routers: auth, chat, menu, prompts, telemetry, users</a:t>
+              <a:t>✔ Automatic data validation</a:t>
             </a:r>
           </a:p>
         </p:txBody>
@@ -6039,7 +6039,7 @@
             <a:avLst/>
           </a:prstGeom>
           <a:solidFill>
-            <a:srgbClr val="FFFFFF"/>
+            <a:srgbClr val="F8FAFC"/>
           </a:solidFill>
           <a:ln w="19050">
             <a:solidFill>
@@ -6078,13 +6078,13 @@
         <p:spPr>
           <a:xfrm>
             <a:off x="3474720" y="1828800"/>
-            <a:ext cx="2468880" cy="73152"/>
+            <a:ext cx="2468880" cy="91440"/>
           </a:xfrm>
           <a:prstGeom prst="rect">
             <a:avLst/>
           </a:prstGeom>
           <a:solidFill>
-            <a:srgbClr val="0284C7"/>
+            <a:srgbClr val="D97706"/>
           </a:solidFill>
           <a:ln>
             <a:noFill/>
@@ -6120,8 +6120,8 @@
         </p:nvSpPr>
         <p:spPr>
           <a:xfrm>
-            <a:off x="3657600" y="1965960"/>
-            <a:ext cx="2103120" cy="4023360"/>
+            <a:off x="3657600" y="2011680"/>
+            <a:ext cx="2103120" cy="3931920"/>
           </a:xfrm>
           <a:prstGeom prst="rect">
             <a:avLst/>
@@ -6135,14 +6135,14 @@
           <a:lstStyle/>
           <a:p>
             <a:pPr>
-              <a:defRPr sz="1100" b="1">
-                <a:solidFill>
-                  <a:srgbClr val="0284C7"/>
-                </a:solidFill>
-              </a:defRPr>
-            </a:pPr>
-            <a:r>
-              <a:t>DATA &amp; ORM</a:t>
+              <a:defRPr sz="1200" b="1">
+                <a:solidFill>
+                  <a:srgbClr val="D97706"/>
+                </a:solidFill>
+              </a:defRPr>
+            </a:pPr>
+            <a:r>
+              <a:t>DATA STORAGE</a:t>
             </a:r>
           </a:p>
           <a:p>
@@ -6150,74 +6150,74 @@
               <a:spcBef>
                 <a:spcPts val="400"/>
               </a:spcBef>
-              <a:defRPr sz="1600" b="1">
+              <a:defRPr sz="1800" b="1">
                 <a:solidFill>
                   <a:srgbClr val="0F172A"/>
                 </a:solidFill>
               </a:defRPr>
             </a:pPr>
             <a:r>
-              <a:t>PostgreSQL 16</a:t>
+              <a:t>SQL Database</a:t>
             </a:r>
           </a:p>
           <a:p>
             <a:pPr>
               <a:spcBef>
-                <a:spcPts val="1000"/>
+                <a:spcPts val="1200"/>
               </a:spcBef>
-              <a:defRPr sz="1200">
+              <a:defRPr sz="1400">
                 <a:solidFill>
                   <a:srgbClr val="1E293B"/>
                 </a:solidFill>
               </a:defRPr>
             </a:pPr>
             <a:r>
-              <a:t>✔ SQLAlchemy 2.0 Async Session (asyncpg)</a:t>
+              <a:t>✔ Customer profiles &amp; taste preferences</a:t>
             </a:r>
           </a:p>
           <a:p>
             <a:pPr>
               <a:spcBef>
-                <a:spcPts val="1000"/>
+                <a:spcPts val="1200"/>
               </a:spcBef>
-              <a:defRPr sz="1200">
+              <a:defRPr sz="1400">
                 <a:solidFill>
                   <a:srgbClr val="1E293B"/>
                 </a:solidFill>
               </a:defRPr>
             </a:pPr>
             <a:r>
-              <a:t>✔ Alembic auto-migrations (0001 → 0003)</a:t>
+              <a:t>✔ Full beverage catalog &amp; live inventory</a:t>
             </a:r>
           </a:p>
           <a:p>
             <a:pPr>
               <a:spcBef>
-                <a:spcPts val="1000"/>
+                <a:spcPts val="1200"/>
               </a:spcBef>
-              <a:defRPr sz="1200">
+              <a:defRPr sz="1400">
                 <a:solidFill>
                   <a:srgbClr val="1E293B"/>
                 </a:solidFill>
               </a:defRPr>
             </a:pPr>
             <a:r>
-              <a:t>✔ Pre-seeded catalog (Coffee, Detox, Protein)</a:t>
+              <a:t>✔ Customer order history &amp; statuses</a:t>
             </a:r>
           </a:p>
           <a:p>
             <a:pPr>
               <a:spcBef>
-                <a:spcPts val="1000"/>
+                <a:spcPts val="1200"/>
               </a:spcBef>
-              <a:defRPr sz="1200">
+              <a:defRPr sz="1400">
                 <a:solidFill>
                   <a:srgbClr val="1E293B"/>
                 </a:solidFill>
               </a:defRPr>
             </a:pPr>
             <a:r>
-              <a:t>✔ Audited PromptVersion &amp; PendingChanges</a:t>
+              <a:t>✔ Audit records &amp; version history</a:t>
             </a:r>
           </a:p>
         </p:txBody>
@@ -6237,7 +6237,7 @@
             <a:avLst/>
           </a:prstGeom>
           <a:solidFill>
-            <a:srgbClr val="FFFFFF"/>
+            <a:srgbClr val="F8FAFC"/>
           </a:solidFill>
           <a:ln w="19050">
             <a:solidFill>
@@ -6276,13 +6276,13 @@
         <p:spPr>
           <a:xfrm>
             <a:off x="6217920" y="1828800"/>
-            <a:ext cx="2468880" cy="73152"/>
+            <a:ext cx="2468880" cy="91440"/>
           </a:xfrm>
           <a:prstGeom prst="rect">
             <a:avLst/>
           </a:prstGeom>
           <a:solidFill>
-            <a:srgbClr val="4338CA"/>
+            <a:srgbClr val="4F46E5"/>
           </a:solidFill>
           <a:ln>
             <a:noFill/>
@@ -6318,8 +6318,8 @@
         </p:nvSpPr>
         <p:spPr>
           <a:xfrm>
-            <a:off x="6400800" y="1965960"/>
-            <a:ext cx="2103120" cy="4023360"/>
+            <a:off x="6400800" y="2011680"/>
+            <a:ext cx="2103120" cy="3931920"/>
           </a:xfrm>
           <a:prstGeom prst="rect">
             <a:avLst/>
@@ -6333,14 +6333,14 @@
           <a:lstStyle/>
           <a:p>
             <a:pPr>
-              <a:defRPr sz="1100" b="1">
-                <a:solidFill>
-                  <a:srgbClr val="4338CA"/>
-                </a:solidFill>
-              </a:defRPr>
-            </a:pPr>
-            <a:r>
-              <a:t>AGENT LOOP</a:t>
+              <a:defRPr sz="1200" b="1">
+                <a:solidFill>
+                  <a:srgbClr val="4F46E5"/>
+                </a:solidFill>
+              </a:defRPr>
+            </a:pPr>
+            <a:r>
+              <a:t>AI AGENT</a:t>
             </a:r>
           </a:p>
           <a:p>
@@ -6348,74 +6348,74 @@
               <a:spcBef>
                 <a:spcPts val="400"/>
               </a:spcBef>
-              <a:defRPr sz="1600" b="1">
+              <a:defRPr sz="1800" b="1">
                 <a:solidFill>
                   <a:srgbClr val="0F172A"/>
                 </a:solidFill>
               </a:defRPr>
             </a:pPr>
             <a:r>
-              <a:t>LangChain Tools</a:t>
+              <a:t>Intelligent Agent</a:t>
             </a:r>
           </a:p>
           <a:p>
             <a:pPr>
               <a:spcBef>
-                <a:spcPts val="1000"/>
+                <a:spcPts val="1200"/>
               </a:spcBef>
-              <a:defRPr sz="1200">
+              <a:defRPr sz="1400">
                 <a:solidFill>
                   <a:srgbClr val="1E293B"/>
                 </a:solidFill>
               </a:defRPr>
             </a:pPr>
             <a:r>
-              <a:t>✔ Autonomous ReAct tool loop (Max 4 turns)</a:t>
+              <a:t>✔ Understands customer drink requests</a:t>
             </a:r>
           </a:p>
           <a:p>
             <a:pPr>
               <a:spcBef>
-                <a:spcPts val="1000"/>
+                <a:spcPts val="1200"/>
               </a:spcBef>
-              <a:defRPr sz="1200">
+              <a:defRPr sz="1400">
                 <a:solidFill>
                   <a:srgbClr val="1E293B"/>
                 </a:solidFill>
               </a:defRPr>
             </a:pPr>
             <a:r>
-              <a:t>✔ 3 core tools: Profile, Recommend, Order</a:t>
+              <a:t>✔ Suggests drinks based on preferences</a:t>
             </a:r>
           </a:p>
           <a:p>
             <a:pPr>
               <a:spcBef>
-                <a:spcPts val="1000"/>
+                <a:spcPts val="1200"/>
               </a:spcBef>
-              <a:defRPr sz="1200">
+              <a:defRPr sz="1400">
                 <a:solidFill>
                   <a:srgbClr val="1E293B"/>
                 </a:solidFill>
               </a:defRPr>
             </a:pPr>
             <a:r>
-              <a:t>✔ Deterministic Python allergen safety gate</a:t>
+              <a:t>✔ Drafts orders with real-time totals</a:t>
             </a:r>
           </a:p>
           <a:p>
             <a:pPr>
               <a:spcBef>
-                <a:spcPts val="1000"/>
+                <a:spcPts val="1200"/>
               </a:spcBef>
-              <a:defRPr sz="1200">
+              <a:defRPr sz="1400">
                 <a:solidFill>
                   <a:srgbClr val="1E293B"/>
                 </a:solidFill>
               </a:defRPr>
             </a:pPr>
             <a:r>
-              <a:t>✔ Zero-cost local Ollama inference fallback</a:t>
+              <a:t>✔ Strict Python-based allergy filters</a:t>
             </a:r>
           </a:p>
         </p:txBody>
@@ -6435,7 +6435,7 @@
             <a:avLst/>
           </a:prstGeom>
           <a:solidFill>
-            <a:srgbClr val="FFFFFF"/>
+            <a:srgbClr val="F8FAFC"/>
           </a:solidFill>
           <a:ln w="19050">
             <a:solidFill>
@@ -6474,7 +6474,7 @@
         <p:spPr>
           <a:xfrm>
             <a:off x="8961120" y="1828800"/>
-            <a:ext cx="2468880" cy="73152"/>
+            <a:ext cx="2468880" cy="91440"/>
           </a:xfrm>
           <a:prstGeom prst="rect">
             <a:avLst/>
@@ -6516,8 +6516,8 @@
         </p:nvSpPr>
         <p:spPr>
           <a:xfrm>
-            <a:off x="9144000" y="1965960"/>
-            <a:ext cx="2103120" cy="4023360"/>
+            <a:off x="9144000" y="2011680"/>
+            <a:ext cx="2103120" cy="3931920"/>
           </a:xfrm>
           <a:prstGeom prst="rect">
             <a:avLst/>
@@ -6531,7 +6531,7 @@
           <a:lstStyle/>
           <a:p>
             <a:pPr>
-              <a:defRPr sz="1100" b="1">
+              <a:defRPr sz="1200" b="1">
                 <a:solidFill>
                   <a:srgbClr val="047857"/>
                 </a:solidFill>
@@ -6546,74 +6546,74 @@
               <a:spcBef>
                 <a:spcPts val="400"/>
               </a:spcBef>
-              <a:defRPr sz="1600" b="1">
+              <a:defRPr sz="1800" b="1">
                 <a:solidFill>
                   <a:srgbClr val="0F172A"/>
                 </a:solidFill>
               </a:defRPr>
             </a:pPr>
             <a:r>
-              <a:t>Docker + Pytest</a:t>
+              <a:t>Docker Containers</a:t>
             </a:r>
           </a:p>
           <a:p>
             <a:pPr>
               <a:spcBef>
-                <a:spcPts val="1000"/>
+                <a:spcPts val="1200"/>
               </a:spcBef>
-              <a:defRPr sz="1200">
+              <a:defRPr sz="1400">
                 <a:solidFill>
                   <a:srgbClr val="1E293B"/>
                 </a:solidFill>
               </a:defRPr>
             </a:pPr>
             <a:r>
-              <a:t>✔ Docker Compose multi-service topology</a:t>
+              <a:t>✔ Packaged with Docker Compose</a:t>
             </a:r>
           </a:p>
           <a:p>
             <a:pPr>
               <a:spcBef>
-                <a:spcPts val="1000"/>
+                <a:spcPts val="1200"/>
               </a:spcBef>
-              <a:defRPr sz="1200">
+              <a:defRPr sz="1400">
                 <a:solidFill>
                   <a:srgbClr val="1E293B"/>
                 </a:solidFill>
               </a:defRPr>
             </a:pPr>
             <a:r>
-              <a:t>✔ Unified Nginx reverse proxy gateway (port 80)</a:t>
+              <a:t>✔ Unified gateway for web &amp; backend</a:t>
             </a:r>
           </a:p>
           <a:p>
             <a:pPr>
               <a:spcBef>
-                <a:spcPts val="1000"/>
+                <a:spcPts val="1200"/>
               </a:spcBef>
-              <a:defRPr sz="1200">
+              <a:defRPr sz="1400">
                 <a:solidFill>
                   <a:srgbClr val="1E293B"/>
                 </a:solidFill>
               </a:defRPr>
             </a:pPr>
             <a:r>
-              <a:t>✔ 73/73 unit &amp; integration tests passing</a:t>
+              <a:t>✔ 73 automated tests passing</a:t>
             </a:r>
           </a:p>
           <a:p>
             <a:pPr>
               <a:spcBef>
-                <a:spcPts val="1000"/>
+                <a:spcPts val="1200"/>
               </a:spcBef>
-              <a:defRPr sz="1200">
+              <a:defRPr sz="1400">
                 <a:solidFill>
                   <a:srgbClr val="1E293B"/>
                 </a:solidFill>
               </a:defRPr>
             </a:pPr>
             <a:r>
-              <a:t>✔ Langfuse tracing &amp; JSON structured logs</a:t>
+              <a:t>✔ Instant deployment readiness</a:t>
             </a:r>
           </a:p>
         </p:txBody>
@@ -6651,7 +6651,7 @@
             <a:avLst/>
           </a:prstGeom>
           <a:solidFill>
-            <a:srgbClr val="F8FAFC"/>
+            <a:srgbClr val="FFFFFF"/>
           </a:solidFill>
           <a:ln>
             <a:noFill/>
@@ -6702,14 +6702,14 @@
           <a:lstStyle/>
           <a:p>
             <a:pPr>
-              <a:defRPr sz="1000">
-                <a:solidFill>
-                  <a:srgbClr val="94A3B8"/>
-                </a:solidFill>
-              </a:defRPr>
-            </a:pPr>
-            <a:r>
-              <a:t>DrinkBot MLOps • TMA Solutions F&amp;B AI Workshop 2026 • Backend Architecture Review</a:t>
+              <a:defRPr sz="1100">
+                <a:solidFill>
+                  <a:srgbClr val="64748B"/>
+                </a:solidFill>
+              </a:defRPr>
+            </a:pPr>
+            <a:r>
+              <a:t>DrinkBot MLOps • F&amp;B AI Assistant &amp; Management Platform</a:t>
             </a:r>
           </a:p>
         </p:txBody>
@@ -6722,8 +6722,8 @@
         </p:nvSpPr>
         <p:spPr>
           <a:xfrm>
-            <a:off x="731520" y="384048"/>
-            <a:ext cx="2926080" cy="292608"/>
+            <a:off x="731520" y="365760"/>
+            <a:ext cx="2560320" cy="320040"/>
           </a:xfrm>
           <a:prstGeom prst="roundRect">
             <a:avLst/>
@@ -6756,14 +6756,14 @@
           <a:lstStyle/>
           <a:p>
             <a:pPr algn="ctr">
-              <a:defRPr sz="1000" b="1">
+              <a:defRPr sz="1100" b="1">
                 <a:solidFill>
                   <a:srgbClr val="78350F"/>
                 </a:solidFill>
               </a:defRPr>
             </a:pPr>
             <a:r>
-              <a:t>● DATA MODELING</a:t>
+              <a:t>DATA MODELING</a:t>
             </a:r>
           </a:p>
         </p:txBody>
@@ -6776,7 +6776,7 @@
         </p:nvSpPr>
         <p:spPr>
           <a:xfrm>
-            <a:off x="731520" y="713232"/>
+            <a:off x="731520" y="731520"/>
             <a:ext cx="10728655" cy="594360"/>
           </a:xfrm>
           <a:prstGeom prst="rect">
@@ -6791,14 +6791,14 @@
           <a:lstStyle/>
           <a:p>
             <a:pPr>
-              <a:defRPr sz="2600" b="1">
+              <a:defRPr sz="3200" b="1">
                 <a:solidFill>
                   <a:srgbClr val="0F172A"/>
                 </a:solidFill>
               </a:defRPr>
             </a:pPr>
             <a:r>
-              <a:t>Domain Entities &amp; Customer Profile Extraction</a:t>
+              <a:t>Customer Profiles &amp; Menu Data Management</a:t>
             </a:r>
           </a:p>
         </p:txBody>
@@ -6811,8 +6811,8 @@
         </p:nvSpPr>
         <p:spPr>
           <a:xfrm>
-            <a:off x="731520" y="1298448"/>
-            <a:ext cx="10728655" cy="365760"/>
+            <a:off x="731520" y="1325880"/>
+            <a:ext cx="10728655" cy="411480"/>
           </a:xfrm>
           <a:prstGeom prst="rect">
             <a:avLst/>
@@ -6826,14 +6826,14 @@
           <a:lstStyle/>
           <a:p>
             <a:pPr>
-              <a:defRPr sz="1300">
-                <a:solidFill>
-                  <a:srgbClr val="475569"/>
-                </a:solidFill>
-              </a:defRPr>
-            </a:pPr>
-            <a:r>
-              <a:t>Capturing workshop-mandated user entities with rich preference structures.</a:t>
+              <a:defRPr sz="1500">
+                <a:solidFill>
+                  <a:srgbClr val="64748B"/>
+                </a:solidFill>
+              </a:defRPr>
+            </a:pPr>
+            <a:r>
+              <a:t>Capturing customer preferences while protecting health safety.</a:t>
             </a:r>
           </a:p>
         </p:txBody>
@@ -6853,7 +6853,7 @@
             <a:avLst/>
           </a:prstGeom>
           <a:solidFill>
-            <a:srgbClr val="FFFFFF"/>
+            <a:srgbClr val="F8FAFC"/>
           </a:solidFill>
           <a:ln w="19050">
             <a:solidFill>
@@ -6892,13 +6892,13 @@
         <p:spPr>
           <a:xfrm>
             <a:off x="731520" y="1828800"/>
-            <a:ext cx="3383280" cy="73152"/>
+            <a:ext cx="3383280" cy="91440"/>
           </a:xfrm>
           <a:prstGeom prst="rect">
             <a:avLst/>
           </a:prstGeom>
           <a:solidFill>
-            <a:srgbClr val="B45309"/>
+            <a:srgbClr val="D97706"/>
           </a:solidFill>
           <a:ln>
             <a:noFill/>
@@ -6934,8 +6934,8 @@
         </p:nvSpPr>
         <p:spPr>
           <a:xfrm>
-            <a:off x="960120" y="1965960"/>
-            <a:ext cx="2926080" cy="4023360"/>
+            <a:off x="960120" y="2057400"/>
+            <a:ext cx="2926080" cy="3931920"/>
           </a:xfrm>
           <a:prstGeom prst="rect">
             <a:avLst/>
@@ -6949,149 +6949,122 @@
           <a:lstStyle/>
           <a:p>
             <a:pPr>
-              <a:defRPr sz="1700" b="1">
-                <a:solidFill>
-                  <a:srgbClr val="B45309"/>
-                </a:solidFill>
-              </a:defRPr>
-            </a:pPr>
-            <a:r>
-              <a:t>Customer Profile Entities</a:t>
+              <a:defRPr sz="2200" b="1">
+                <a:solidFill>
+                  <a:srgbClr val="D97706"/>
+                </a:solidFill>
+              </a:defRPr>
+            </a:pPr>
+            <a:r>
+              <a:t>Customer Profile</a:t>
             </a:r>
           </a:p>
           <a:p>
             <a:pPr>
               <a:spcBef>
-                <a:spcPts val="800"/>
+                <a:spcPts val="1200"/>
               </a:spcBef>
-              <a:defRPr sz="1300" b="1">
+              <a:defRPr sz="1600" b="1">
                 <a:solidFill>
                   <a:srgbClr val="0F172A"/>
                 </a:solidFill>
               </a:defRPr>
             </a:pPr>
             <a:r>
-              <a:t>• User Entity:</a:t>
-            </a:r>
-          </a:p>
-          <a:p>
-            <a:pPr>
-              <a:defRPr sz="1200">
-                <a:solidFill>
-                  <a:srgbClr val="475569"/>
-                </a:solidFill>
-              </a:defRPr>
-            </a:pPr>
-            <a:r>
-              <a:t>   phone (Unique Identifier), name, delivery address.</a:t>
+              <a:t>• Core Contact Details:</a:t>
+            </a:r>
+          </a:p>
+          <a:p>
+            <a:pPr>
+              <a:defRPr sz="1400">
+                <a:solidFill>
+                  <a:srgbClr val="1E293B"/>
+                </a:solidFill>
+              </a:defRPr>
+            </a:pPr>
+            <a:r>
+              <a:t>   Phone number, full name, and delivery address.</a:t>
             </a:r>
           </a:p>
           <a:p>
             <a:pPr>
               <a:spcBef>
-                <a:spcPts val="800"/>
+                <a:spcPts val="1200"/>
               </a:spcBef>
-              <a:defRPr sz="1300" b="1">
+              <a:defRPr sz="1600" b="1">
                 <a:solidFill>
                   <a:srgbClr val="0F172A"/>
                 </a:solidFill>
               </a:defRPr>
             </a:pPr>
             <a:r>
-              <a:t>• Taste Preferences:</a:t>
-            </a:r>
-          </a:p>
-          <a:p>
-            <a:pPr>
-              <a:defRPr sz="1200">
-                <a:solidFill>
-                  <a:srgbClr val="475569"/>
-                </a:solidFill>
-              </a:defRPr>
-            </a:pPr>
-            <a:r>
-              <a:t>   Array of flavor profiles: sweet, bitter, fruity, sour.</a:t>
+              <a:t>• Flavor Preferences:</a:t>
+            </a:r>
+          </a:p>
+          <a:p>
+            <a:pPr>
+              <a:defRPr sz="1400">
+                <a:solidFill>
+                  <a:srgbClr val="1E293B"/>
+                </a:solidFill>
+              </a:defRPr>
+            </a:pPr>
+            <a:r>
+              <a:t>   Sweetness, bitterness, fruity tastes, and temperature.</a:t>
             </a:r>
           </a:p>
           <a:p>
             <a:pPr>
               <a:spcBef>
-                <a:spcPts val="800"/>
+                <a:spcPts val="1200"/>
               </a:spcBef>
-              <a:defRPr sz="1300" b="1">
+              <a:defRPr sz="1600" b="1">
                 <a:solidFill>
                   <a:srgbClr val="0F172A"/>
                 </a:solidFill>
               </a:defRPr>
             </a:pPr>
             <a:r>
-              <a:t>• Beverage Categories:</a:t>
-            </a:r>
-          </a:p>
-          <a:p>
-            <a:pPr>
-              <a:defRPr sz="1200">
-                <a:solidFill>
-                  <a:srgbClr val="475569"/>
-                </a:solidFill>
-              </a:defRPr>
-            </a:pPr>
-            <a:r>
-              <a:t>   Preferred drink types: tea, coffee, smoothie, protein.</a:t>
+              <a:t>• Health &amp; Caffeine:</a:t>
+            </a:r>
+          </a:p>
+          <a:p>
+            <a:pPr>
+              <a:defRPr sz="1400">
+                <a:solidFill>
+                  <a:srgbClr val="1E293B"/>
+                </a:solidFill>
+              </a:defRPr>
+            </a:pPr>
+            <a:r>
+              <a:t>   Caffeine preferences (high/low/decaf) and dietary notes.</a:t>
             </a:r>
           </a:p>
           <a:p>
             <a:pPr>
               <a:spcBef>
-                <a:spcPts val="800"/>
+                <a:spcPts val="1200"/>
               </a:spcBef>
-              <a:defRPr sz="1300" b="1">
+              <a:defRPr sz="1600" b="1">
                 <a:solidFill>
                   <a:srgbClr val="0F172A"/>
                 </a:solidFill>
               </a:defRPr>
             </a:pPr>
             <a:r>
-              <a:t>• Health Constraints:</a:t>
-            </a:r>
-          </a:p>
-          <a:p>
-            <a:pPr>
-              <a:defRPr sz="1200">
-                <a:solidFill>
-                  <a:srgbClr val="475569"/>
-                </a:solidFill>
-              </a:defRPr>
-            </a:pPr>
-            <a:r>
-              <a:t>   temperature (iced/hot), caffeine (high/low/none).</a:t>
-            </a:r>
-          </a:p>
-          <a:p>
-            <a:pPr>
-              <a:spcBef>
-                <a:spcPts val="800"/>
-              </a:spcBef>
-              <a:defRPr sz="1300" b="1">
-                <a:solidFill>
-                  <a:srgbClr val="0F172A"/>
-                </a:solidFill>
-              </a:defRPr>
-            </a:pPr>
-            <a:r>
-              <a:t>• Allergies:</a:t>
-            </a:r>
-          </a:p>
-          <a:p>
-            <a:pPr>
-              <a:defRPr sz="1200">
-                <a:solidFill>
-                  <a:srgbClr val="475569"/>
-                </a:solidFill>
-              </a:defRPr>
-            </a:pPr>
-            <a:r>
-              <a:t>   dairy, nuts, gluten — triggers automatic exclusion.</a:t>
+              <a:t>• Allergy Safety:</a:t>
+            </a:r>
+          </a:p>
+          <a:p>
+            <a:pPr>
+              <a:defRPr sz="1400">
+                <a:solidFill>
+                  <a:srgbClr val="1E293B"/>
+                </a:solidFill>
+              </a:defRPr>
+            </a:pPr>
+            <a:r>
+              <a:t>   Recorded food allergies (dairy, nuts, gluten).</a:t>
             </a:r>
           </a:p>
         </p:txBody>
@@ -7111,7 +7084,7 @@
             <a:avLst/>
           </a:prstGeom>
           <a:solidFill>
-            <a:srgbClr val="FFFFFF"/>
+            <a:srgbClr val="F8FAFC"/>
           </a:solidFill>
           <a:ln w="19050">
             <a:solidFill>
@@ -7150,7 +7123,7 @@
         <p:spPr>
           <a:xfrm>
             <a:off x="4389120" y="1828800"/>
-            <a:ext cx="3383280" cy="73152"/>
+            <a:ext cx="3383280" cy="91440"/>
           </a:xfrm>
           <a:prstGeom prst="rect">
             <a:avLst/>
@@ -7192,8 +7165,8 @@
         </p:nvSpPr>
         <p:spPr>
           <a:xfrm>
-            <a:off x="4617720" y="1965960"/>
-            <a:ext cx="2926080" cy="4023360"/>
+            <a:off x="4617720" y="2057400"/>
+            <a:ext cx="2926080" cy="3931920"/>
           </a:xfrm>
           <a:prstGeom prst="rect">
             <a:avLst/>
@@ -7207,149 +7180,122 @@
           <a:lstStyle/>
           <a:p>
             <a:pPr>
-              <a:defRPr sz="1700" b="1">
+              <a:defRPr sz="2200" b="1">
                 <a:solidFill>
                   <a:srgbClr val="0284C7"/>
                 </a:solidFill>
               </a:defRPr>
             </a:pPr>
             <a:r>
-              <a:t>Menu &amp; Commercial Orders</a:t>
+              <a:t>Menu &amp; Orders</a:t>
             </a:r>
           </a:p>
           <a:p>
             <a:pPr>
               <a:spcBef>
-                <a:spcPts val="800"/>
+                <a:spcPts val="1200"/>
               </a:spcBef>
-              <a:defRPr sz="1300" b="1">
+              <a:defRPr sz="1600" b="1">
                 <a:solidFill>
                   <a:srgbClr val="0F172A"/>
                 </a:solidFill>
               </a:defRPr>
             </a:pPr>
             <a:r>
-              <a:t>• MenuItem Catalog:</a:t>
-            </a:r>
-          </a:p>
-          <a:p>
-            <a:pPr>
-              <a:defRPr sz="1200">
-                <a:solidFill>
-                  <a:srgbClr val="475569"/>
-                </a:solidFill>
-              </a:defRPr>
-            </a:pPr>
-            <a:r>
-              <a:t>   name, category, price, description, is_available.</a:t>
+              <a:t>• Beverage Catalog:</a:t>
+            </a:r>
+          </a:p>
+          <a:p>
+            <a:pPr>
+              <a:defRPr sz="1400">
+                <a:solidFill>
+                  <a:srgbClr val="1E293B"/>
+                </a:solidFill>
+              </a:defRPr>
+            </a:pPr>
+            <a:r>
+              <a:t>   Drink names, descriptions, prices, and allergen flags.</a:t>
             </a:r>
           </a:p>
           <a:p>
             <a:pPr>
               <a:spcBef>
-                <a:spcPts val="800"/>
+                <a:spcPts val="1200"/>
               </a:spcBef>
-              <a:defRPr sz="1300" b="1">
+              <a:defRPr sz="1600" b="1">
                 <a:solidFill>
                   <a:srgbClr val="0F172A"/>
                 </a:solidFill>
               </a:defRPr>
             </a:pPr>
             <a:r>
-              <a:t>• Allergen Metadata:</a:t>
-            </a:r>
-          </a:p>
-          <a:p>
-            <a:pPr>
-              <a:defRPr sz="1200">
-                <a:solidFill>
-                  <a:srgbClr val="475569"/>
-                </a:solidFill>
-              </a:defRPr>
-            </a:pPr>
-            <a:r>
-              <a:t>   Structured array of declared allergens per item.</a:t>
+              <a:t>• Diverse Drink Options:</a:t>
+            </a:r>
+          </a:p>
+          <a:p>
+            <a:pPr>
+              <a:defRPr sz="1400">
+                <a:solidFill>
+                  <a:srgbClr val="1E293B"/>
+                </a:solidFill>
+              </a:defRPr>
+            </a:pPr>
+            <a:r>
+              <a:t>   Coffee, Teas, Detox blends, Protein shakes, Juices.</a:t>
             </a:r>
           </a:p>
           <a:p>
             <a:pPr>
               <a:spcBef>
-                <a:spcPts val="800"/>
+                <a:spcPts val="1200"/>
               </a:spcBef>
-              <a:defRPr sz="1300" b="1">
+              <a:defRPr sz="1600" b="1">
                 <a:solidFill>
                   <a:srgbClr val="0F172A"/>
                 </a:solidFill>
               </a:defRPr>
             </a:pPr>
             <a:r>
-              <a:t>• Category Diversity:</a:t>
-            </a:r>
-          </a:p>
-          <a:p>
-            <a:pPr>
-              <a:defRPr sz="1200">
-                <a:solidFill>
-                  <a:srgbClr val="475569"/>
-                </a:solidFill>
-              </a:defRPr>
-            </a:pPr>
-            <a:r>
-              <a:t>   5 curated categories: Coffee, Tea, Protein, Detox, Juices.</a:t>
+              <a:t>• Live Order Tracking:</a:t>
+            </a:r>
+          </a:p>
+          <a:p>
+            <a:pPr>
+              <a:defRPr sz="1400">
+                <a:solidFill>
+                  <a:srgbClr val="1E293B"/>
+                </a:solidFill>
+              </a:defRPr>
+            </a:pPr>
+            <a:r>
+              <a:t>   Tracks items, item quantities, and total order amounts.</a:t>
             </a:r>
           </a:p>
           <a:p>
             <a:pPr>
               <a:spcBef>
-                <a:spcPts val="800"/>
+                <a:spcPts val="1200"/>
               </a:spcBef>
-              <a:defRPr sz="1300" b="1">
+              <a:defRPr sz="1600" b="1">
                 <a:solidFill>
                   <a:srgbClr val="0F172A"/>
                 </a:solidFill>
               </a:defRPr>
             </a:pPr>
             <a:r>
-              <a:t>• Order &amp; OrderItem:</a:t>
-            </a:r>
-          </a:p>
-          <a:p>
-            <a:pPr>
-              <a:defRPr sz="1200">
-                <a:solidFill>
-                  <a:srgbClr val="475569"/>
-                </a:solidFill>
-              </a:defRPr>
-            </a:pPr>
-            <a:r>
-              <a:t>   Links customer to selected items with live prices.</a:t>
-            </a:r>
-          </a:p>
-          <a:p>
-            <a:pPr>
-              <a:spcBef>
-                <a:spcPts val="800"/>
-              </a:spcBef>
-              <a:defRPr sz="1300" b="1">
-                <a:solidFill>
-                  <a:srgbClr val="0F172A"/>
-                </a:solidFill>
-              </a:defRPr>
-            </a:pPr>
-            <a:r>
-              <a:t>• Order Lifecycle:</a:t>
-            </a:r>
-          </a:p>
-          <a:p>
-            <a:pPr>
-              <a:defRPr sz="1200">
-                <a:solidFill>
-                  <a:srgbClr val="475569"/>
-                </a:solidFill>
-              </a:defRPr>
-            </a:pPr>
-            <a:r>
-              <a:t>   Status transitions: pending → placed / cancelled.</a:t>
+              <a:t>• Order Status Flow:</a:t>
+            </a:r>
+          </a:p>
+          <a:p>
+            <a:pPr>
+              <a:defRPr sz="1400">
+                <a:solidFill>
+                  <a:srgbClr val="1E293B"/>
+                </a:solidFill>
+              </a:defRPr>
+            </a:pPr>
+            <a:r>
+              <a:t>   Clear status lifecycle: Pending → Confirmed → Completed.</a:t>
             </a:r>
           </a:p>
         </p:txBody>
@@ -7369,7 +7315,7 @@
             <a:avLst/>
           </a:prstGeom>
           <a:solidFill>
-            <a:srgbClr val="FFFFFF"/>
+            <a:srgbClr val="F8FAFC"/>
           </a:solidFill>
           <a:ln w="19050">
             <a:solidFill>
@@ -7408,13 +7354,13 @@
         <p:spPr>
           <a:xfrm>
             <a:off x="8046720" y="1828800"/>
-            <a:ext cx="3383280" cy="73152"/>
+            <a:ext cx="3383280" cy="91440"/>
           </a:xfrm>
           <a:prstGeom prst="rect">
             <a:avLst/>
           </a:prstGeom>
           <a:solidFill>
-            <a:srgbClr val="4338CA"/>
+            <a:srgbClr val="4F46E5"/>
           </a:solidFill>
           <a:ln>
             <a:noFill/>
@@ -7450,8 +7396,8 @@
         </p:nvSpPr>
         <p:spPr>
           <a:xfrm>
-            <a:off x="8275320" y="1965960"/>
-            <a:ext cx="2926080" cy="4023360"/>
+            <a:off x="8275320" y="2057400"/>
+            <a:ext cx="2926080" cy="3931920"/>
           </a:xfrm>
           <a:prstGeom prst="rect">
             <a:avLst/>
@@ -7465,149 +7411,122 @@
           <a:lstStyle/>
           <a:p>
             <a:pPr>
-              <a:defRPr sz="1700" b="1">
-                <a:solidFill>
-                  <a:srgbClr val="4338CA"/>
-                </a:solidFill>
-              </a:defRPr>
-            </a:pPr>
-            <a:r>
-              <a:t>MLOps Telemetry &amp; State</a:t>
+              <a:defRPr sz="2200" b="1">
+                <a:solidFill>
+                  <a:srgbClr val="4F46E5"/>
+                </a:solidFill>
+              </a:defRPr>
+            </a:pPr>
+            <a:r>
+              <a:t>Operational Logs</a:t>
             </a:r>
           </a:p>
           <a:p>
             <a:pPr>
               <a:spcBef>
-                <a:spcPts val="800"/>
+                <a:spcPts val="1200"/>
               </a:spcBef>
-              <a:defRPr sz="1300" b="1">
+              <a:defRPr sz="1600" b="1">
                 <a:solidFill>
                   <a:srgbClr val="0F172A"/>
                 </a:solidFill>
               </a:defRPr>
             </a:pPr>
             <a:r>
-              <a:t>• ChatMessage:</a:t>
-            </a:r>
-          </a:p>
-          <a:p>
-            <a:pPr>
-              <a:defRPr sz="1200">
-                <a:solidFill>
-                  <a:srgbClr val="475569"/>
-                </a:solidFill>
-              </a:defRPr>
-            </a:pPr>
-            <a:r>
-              <a:t>   Logs role, content, user_id, and timestamps.</a:t>
+              <a:t>• Chat History:</a:t>
+            </a:r>
+          </a:p>
+          <a:p>
+            <a:pPr>
+              <a:defRPr sz="1400">
+                <a:solidFill>
+                  <a:srgbClr val="1E293B"/>
+                </a:solidFill>
+              </a:defRPr>
+            </a:pPr>
+            <a:r>
+              <a:t>   Records user messages and AI recommendations.</a:t>
             </a:r>
           </a:p>
           <a:p>
             <a:pPr>
               <a:spcBef>
-                <a:spcPts val="800"/>
+                <a:spcPts val="1200"/>
               </a:spcBef>
-              <a:defRPr sz="1300" b="1">
+              <a:defRPr sz="1600" b="1">
                 <a:solidFill>
                   <a:srgbClr val="0F172A"/>
                 </a:solidFill>
               </a:defRPr>
             </a:pPr>
             <a:r>
-              <a:t>• Token &amp; Cost Metrics:</a:t>
-            </a:r>
-          </a:p>
-          <a:p>
-            <a:pPr>
-              <a:defRPr sz="1200">
-                <a:solidFill>
-                  <a:srgbClr val="475569"/>
-                </a:solidFill>
-              </a:defRPr>
-            </a:pPr>
-            <a:r>
-              <a:t>   Stores model_name, input_tokens, output_tokens, cost.</a:t>
+              <a:t>• AI Usage Tracking:</a:t>
+            </a:r>
+          </a:p>
+          <a:p>
+            <a:pPr>
+              <a:defRPr sz="1400">
+                <a:solidFill>
+                  <a:srgbClr val="1E293B"/>
+                </a:solidFill>
+              </a:defRPr>
+            </a:pPr>
+            <a:r>
+              <a:t>   Monitors token count and exact costs for every message.</a:t>
             </a:r>
           </a:p>
           <a:p>
             <a:pPr>
               <a:spcBef>
-                <a:spcPts val="800"/>
+                <a:spcPts val="1200"/>
               </a:spcBef>
-              <a:defRPr sz="1300" b="1">
+              <a:defRPr sz="1600" b="1">
                 <a:solidFill>
                   <a:srgbClr val="0F172A"/>
                 </a:solidFill>
               </a:defRPr>
             </a:pPr>
             <a:r>
-              <a:t>• PromptVersion Store:</a:t>
-            </a:r>
-          </a:p>
-          <a:p>
-            <a:pPr>
-              <a:defRPr sz="1200">
-                <a:solidFill>
-                  <a:srgbClr val="475569"/>
-                </a:solidFill>
-              </a:defRPr>
-            </a:pPr>
-            <a:r>
-              <a:t>   Immutable record of templates, hashes, and active flags.</a:t>
+              <a:t>• Prompt Version History:</a:t>
+            </a:r>
+          </a:p>
+          <a:p>
+            <a:pPr>
+              <a:defRPr sz="1400">
+                <a:solidFill>
+                  <a:srgbClr val="1E293B"/>
+                </a:solidFill>
+              </a:defRPr>
+            </a:pPr>
+            <a:r>
+              <a:t>   Maintains active prompt templates and revision logs.</a:t>
             </a:r>
           </a:p>
           <a:p>
             <a:pPr>
               <a:spcBef>
-                <a:spcPts val="800"/>
+                <a:spcPts val="1200"/>
               </a:spcBef>
-              <a:defRPr sz="1300" b="1">
+              <a:defRPr sz="1600" b="1">
                 <a:solidFill>
                   <a:srgbClr val="0F172A"/>
                 </a:solidFill>
               </a:defRPr>
             </a:pPr>
             <a:r>
-              <a:t>• PendingPreferenceChange:</a:t>
-            </a:r>
-          </a:p>
-          <a:p>
-            <a:pPr>
-              <a:defRPr sz="1200">
-                <a:solidFill>
-                  <a:srgbClr val="475569"/>
-                </a:solidFill>
-              </a:defRPr>
-            </a:pPr>
-            <a:r>
-              <a:t>   Staged user profile changes awaiting human confirmation.</a:t>
-            </a:r>
-          </a:p>
-          <a:p>
-            <a:pPr>
-              <a:spcBef>
-                <a:spcPts val="800"/>
-              </a:spcBef>
-              <a:defRPr sz="1300" b="1">
-                <a:solidFill>
-                  <a:srgbClr val="0F172A"/>
-                </a:solidFill>
-              </a:defRPr>
-            </a:pPr>
-            <a:r>
-              <a:t>• Audit Lineage:</a:t>
-            </a:r>
-          </a:p>
-          <a:p>
-            <a:pPr>
-              <a:defRPr sz="1200">
-                <a:solidFill>
-                  <a:srgbClr val="475569"/>
-                </a:solidFill>
-              </a:defRPr>
-            </a:pPr>
-            <a:r>
-              <a:t>   Full traceability from customer query to LLM generation.</a:t>
+              <a:t>• Pending Approvals:</a:t>
+            </a:r>
+          </a:p>
+          <a:p>
+            <a:pPr>
+              <a:defRPr sz="1400">
+                <a:solidFill>
+                  <a:srgbClr val="1E293B"/>
+                </a:solidFill>
+              </a:defRPr>
+            </a:pPr>
+            <a:r>
+              <a:t>   Holds profile changes until verified by customer.</a:t>
             </a:r>
           </a:p>
         </p:txBody>
@@ -7645,7 +7564,7 @@
             <a:avLst/>
           </a:prstGeom>
           <a:solidFill>
-            <a:srgbClr val="F8FAFC"/>
+            <a:srgbClr val="FFFFFF"/>
           </a:solidFill>
           <a:ln>
             <a:noFill/>
@@ -7696,14 +7615,14 @@
           <a:lstStyle/>
           <a:p>
             <a:pPr>
-              <a:defRPr sz="1000">
-                <a:solidFill>
-                  <a:srgbClr val="94A3B8"/>
-                </a:solidFill>
-              </a:defRPr>
-            </a:pPr>
-            <a:r>
-              <a:t>DrinkBot MLOps • TMA Solutions F&amp;B AI Workshop 2026 • Backend Architecture Review</a:t>
+              <a:defRPr sz="1100">
+                <a:solidFill>
+                  <a:srgbClr val="64748B"/>
+                </a:solidFill>
+              </a:defRPr>
+            </a:pPr>
+            <a:r>
+              <a:t>DrinkBot MLOps • F&amp;B AI Assistant &amp; Management Platform</a:t>
             </a:r>
           </a:p>
         </p:txBody>
@@ -7716,8 +7635,8 @@
         </p:nvSpPr>
         <p:spPr>
           <a:xfrm>
-            <a:off x="731520" y="384048"/>
-            <a:ext cx="2926080" cy="292608"/>
+            <a:off x="731520" y="365760"/>
+            <a:ext cx="2560320" cy="320040"/>
           </a:xfrm>
           <a:prstGeom prst="roundRect">
             <a:avLst/>
@@ -7750,14 +7669,14 @@
           <a:lstStyle/>
           <a:p>
             <a:pPr algn="ctr">
-              <a:defRPr sz="1000" b="1">
+              <a:defRPr sz="1100" b="1">
                 <a:solidFill>
                   <a:srgbClr val="78350F"/>
                 </a:solidFill>
               </a:defRPr>
             </a:pPr>
             <a:r>
-              <a:t>● AGENT INTELLIGENCE &amp; SAFETY</a:t>
+              <a:t>AI SAFETY &amp; CONTROL</a:t>
             </a:r>
           </a:p>
         </p:txBody>
@@ -7770,7 +7689,7 @@
         </p:nvSpPr>
         <p:spPr>
           <a:xfrm>
-            <a:off x="731520" y="713232"/>
+            <a:off x="731520" y="731520"/>
             <a:ext cx="10728655" cy="594360"/>
           </a:xfrm>
           <a:prstGeom prst="rect">
@@ -7785,14 +7704,14 @@
           <a:lstStyle/>
           <a:p>
             <a:pPr>
-              <a:defRPr sz="2600" b="1">
+              <a:defRPr sz="3200" b="1">
                 <a:solidFill>
                   <a:srgbClr val="0F172A"/>
                 </a:solidFill>
               </a:defRPr>
             </a:pPr>
             <a:r>
-              <a:t>Autonomous Chat Agent &amp; Two-Stage Human Approval</a:t>
+              <a:t>AI Agent &amp; Two-Stage Human Approval</a:t>
             </a:r>
           </a:p>
         </p:txBody>
@@ -7805,8 +7724,8 @@
         </p:nvSpPr>
         <p:spPr>
           <a:xfrm>
-            <a:off x="731520" y="1298448"/>
-            <a:ext cx="10728655" cy="365760"/>
+            <a:off x="731520" y="1325880"/>
+            <a:ext cx="10728655" cy="411480"/>
           </a:xfrm>
           <a:prstGeom prst="rect">
             <a:avLst/>
@@ -7820,14 +7739,14 @@
           <a:lstStyle/>
           <a:p>
             <a:pPr>
-              <a:defRPr sz="1300">
-                <a:solidFill>
-                  <a:srgbClr val="475569"/>
-                </a:solidFill>
-              </a:defRPr>
-            </a:pPr>
-            <a:r>
-              <a:t>Balancing dynamic conversational flexibility with rigorous deterministic safeguards.</a:t>
+              <a:defRPr sz="1500">
+                <a:solidFill>
+                  <a:srgbClr val="64748B"/>
+                </a:solidFill>
+              </a:defRPr>
+            </a:pPr>
+            <a:r>
+              <a:t>Smart conversational recommendations backed by strict safety guardrails.</a:t>
             </a:r>
           </a:p>
         </p:txBody>
@@ -7847,7 +7766,7 @@
             <a:avLst/>
           </a:prstGeom>
           <a:solidFill>
-            <a:srgbClr val="FFFFFF"/>
+            <a:srgbClr val="F8FAFC"/>
           </a:solidFill>
           <a:ln w="19050">
             <a:solidFill>
@@ -7886,13 +7805,13 @@
         <p:spPr>
           <a:xfrm>
             <a:off x="731520" y="1828800"/>
-            <a:ext cx="3383280" cy="73152"/>
+            <a:ext cx="3383280" cy="91440"/>
           </a:xfrm>
           <a:prstGeom prst="rect">
             <a:avLst/>
           </a:prstGeom>
           <a:solidFill>
-            <a:srgbClr val="B45309"/>
+            <a:srgbClr val="D97706"/>
           </a:solidFill>
           <a:ln>
             <a:noFill/>
@@ -7928,8 +7847,8 @@
         </p:nvSpPr>
         <p:spPr>
           <a:xfrm>
-            <a:off x="960120" y="1965960"/>
-            <a:ext cx="2926080" cy="4023360"/>
+            <a:off x="960120" y="2057400"/>
+            <a:ext cx="2926080" cy="3931920"/>
           </a:xfrm>
           <a:prstGeom prst="rect">
             <a:avLst/>
@@ -7943,110 +7862,122 @@
           <a:lstStyle/>
           <a:p>
             <a:pPr>
-              <a:defRPr sz="1700" b="1">
-                <a:solidFill>
-                  <a:srgbClr val="B45309"/>
-                </a:solidFill>
-              </a:defRPr>
-            </a:pPr>
-            <a:r>
-              <a:t>1. Tool-Calling ReAct Loop</a:t>
+              <a:defRPr sz="2100" b="1">
+                <a:solidFill>
+                  <a:srgbClr val="D97706"/>
+                </a:solidFill>
+              </a:defRPr>
+            </a:pPr>
+            <a:r>
+              <a:t>1. Conversational Agent</a:t>
             </a:r>
           </a:p>
           <a:p>
             <a:pPr>
               <a:spcBef>
-                <a:spcPts val="600"/>
+                <a:spcPts val="1200"/>
               </a:spcBef>
-              <a:defRPr sz="1200">
-                <a:solidFill>
-                  <a:srgbClr val="475569"/>
-                </a:solidFill>
-              </a:defRPr>
-            </a:pPr>
-            <a:r>
-              <a:t>Autonomous execution up to 4 iterations with dedicated tool executors:</a:t>
+              <a:defRPr sz="1600" b="1">
+                <a:solidFill>
+                  <a:srgbClr val="0F172A"/>
+                </a:solidFill>
+              </a:defRPr>
+            </a:pPr>
+            <a:r>
+              <a:t>• Natural Dialogue:</a:t>
+            </a:r>
+          </a:p>
+          <a:p>
+            <a:pPr>
+              <a:defRPr sz="1400">
+                <a:solidFill>
+                  <a:srgbClr val="1E293B"/>
+                </a:solidFill>
+              </a:defRPr>
+            </a:pPr>
+            <a:r>
+              <a:t>   Understands customer drink requests in plain language.</a:t>
             </a:r>
           </a:p>
           <a:p>
             <a:pPr>
               <a:spcBef>
-                <a:spcPts val="800"/>
+                <a:spcPts val="1200"/>
               </a:spcBef>
-              <a:defRPr sz="1300" b="1">
+              <a:defRPr sz="1600" b="1">
                 <a:solidFill>
                   <a:srgbClr val="0F172A"/>
                 </a:solidFill>
               </a:defRPr>
             </a:pPr>
             <a:r>
-              <a:t>• recommend_drink:</a:t>
-            </a:r>
-          </a:p>
-          <a:p>
-            <a:pPr>
-              <a:defRPr sz="1200">
-                <a:solidFill>
-                  <a:srgbClr val="475569"/>
-                </a:solidFill>
-              </a:defRPr>
-            </a:pPr>
-            <a:r>
-              <a:t>   Searches live menu items matching taste query &amp; constraints.</a:t>
+              <a:t>• Smart Tools:</a:t>
+            </a:r>
+          </a:p>
+          <a:p>
+            <a:pPr>
+              <a:defRPr sz="1400">
+                <a:solidFill>
+                  <a:srgbClr val="1E293B"/>
+                </a:solidFill>
+              </a:defRPr>
+            </a:pPr>
+            <a:r>
+              <a:t>   Automatically looks up drinks, updates profiles, and drafts orders.</a:t>
             </a:r>
           </a:p>
           <a:p>
             <a:pPr>
               <a:spcBef>
-                <a:spcPts val="800"/>
+                <a:spcPts val="1200"/>
               </a:spcBef>
-              <a:defRPr sz="1300" b="1">
+              <a:defRPr sz="1600" b="1">
                 <a:solidFill>
                   <a:srgbClr val="0F172A"/>
                 </a:solidFill>
               </a:defRPr>
             </a:pPr>
             <a:r>
-              <a:t>• update_profile:</a:t>
-            </a:r>
-          </a:p>
-          <a:p>
-            <a:pPr>
-              <a:defRPr sz="1200">
-                <a:solidFill>
-                  <a:srgbClr val="475569"/>
-                </a:solidFill>
-              </a:defRPr>
-            </a:pPr>
-            <a:r>
-              <a:t>   Extracts newly disclosed customer preferences from conversation.</a:t>
+              <a:t>• Menu Grounding:</a:t>
+            </a:r>
+          </a:p>
+          <a:p>
+            <a:pPr>
+              <a:defRPr sz="1400">
+                <a:solidFill>
+                  <a:srgbClr val="1E293B"/>
+                </a:solidFill>
+              </a:defRPr>
+            </a:pPr>
+            <a:r>
+              <a:t>   Only references actual drinks and prices in the catalog.</a:t>
             </a:r>
           </a:p>
           <a:p>
             <a:pPr>
               <a:spcBef>
-                <a:spcPts val="800"/>
+                <a:spcPts val="1200"/>
               </a:spcBef>
-              <a:defRPr sz="1300" b="1">
+              <a:defRPr sz="1600" b="1">
                 <a:solidFill>
                   <a:srgbClr val="0F172A"/>
                 </a:solidFill>
               </a:defRPr>
             </a:pPr>
             <a:r>
-              <a:t>• order:</a:t>
-            </a:r>
-          </a:p>
-          <a:p>
-            <a:pPr>
-              <a:defRPr sz="1200">
-                <a:solidFill>
-                  <a:srgbClr val="475569"/>
-                </a:solidFill>
-              </a:defRPr>
-            </a:pPr>
-            <a:r>
-              <a:t>   Calculates totals and constructs pending order preview for checkout.</a:t>
+              <a:t>• Loop Protection:</a:t>
+            </a:r>
+          </a:p>
+          <a:p>
+            <a:pPr>
+              <a:defRPr sz="1400">
+                <a:solidFill>
+                  <a:srgbClr val="1E293B"/>
+                </a:solidFill>
+              </a:defRPr>
+            </a:pPr>
+            <a:r>
+              <a:t>   Built-in limits prevent repetitive or runaway responses.</a:t>
             </a:r>
           </a:p>
         </p:txBody>
@@ -8066,7 +7997,7 @@
             <a:avLst/>
           </a:prstGeom>
           <a:solidFill>
-            <a:srgbClr val="FFFFFF"/>
+            <a:srgbClr val="F8FAFC"/>
           </a:solidFill>
           <a:ln w="19050">
             <a:solidFill>
@@ -8105,7 +8036,7 @@
         <p:spPr>
           <a:xfrm>
             <a:off x="4389120" y="1828800"/>
-            <a:ext cx="3383280" cy="73152"/>
+            <a:ext cx="3383280" cy="91440"/>
           </a:xfrm>
           <a:prstGeom prst="rect">
             <a:avLst/>
@@ -8147,8 +8078,8 @@
         </p:nvSpPr>
         <p:spPr>
           <a:xfrm>
-            <a:off x="4617720" y="1965960"/>
-            <a:ext cx="2926080" cy="4023360"/>
+            <a:off x="4617720" y="2057400"/>
+            <a:ext cx="2926080" cy="3931920"/>
           </a:xfrm>
           <a:prstGeom prst="rect">
             <a:avLst/>
@@ -8162,110 +8093,122 @@
           <a:lstStyle/>
           <a:p>
             <a:pPr>
-              <a:defRPr sz="1700" b="1">
+              <a:defRPr sz="2100" b="1">
                 <a:solidFill>
                   <a:srgbClr val="BE123C"/>
                 </a:solidFill>
               </a:defRPr>
             </a:pPr>
             <a:r>
-              <a:t>2. Python Allergen Guardrail</a:t>
+              <a:t>2. Allergy Safety Gate</a:t>
             </a:r>
           </a:p>
           <a:p>
             <a:pPr>
               <a:spcBef>
-                <a:spcPts val="600"/>
+                <a:spcPts val="1200"/>
               </a:spcBef>
-              <a:defRPr sz="1200">
-                <a:solidFill>
-                  <a:srgbClr val="475569"/>
-                </a:solidFill>
-              </a:defRPr>
-            </a:pPr>
-            <a:r>
-              <a:t>Never entrust customer health safety solely to stochastic LLM responses:</a:t>
+              <a:defRPr sz="1600" b="1">
+                <a:solidFill>
+                  <a:srgbClr val="0F172A"/>
+                </a:solidFill>
+              </a:defRPr>
+            </a:pPr>
+            <a:r>
+              <a:t>• Code-Level Safety:</a:t>
+            </a:r>
+          </a:p>
+          <a:p>
+            <a:pPr>
+              <a:defRPr sz="1400">
+                <a:solidFill>
+                  <a:srgbClr val="1E293B"/>
+                </a:solidFill>
+              </a:defRPr>
+            </a:pPr>
+            <a:r>
+              <a:t>   Health safety rules enforced by strict code, not left to AI.</a:t>
             </a:r>
           </a:p>
           <a:p>
             <a:pPr>
               <a:spcBef>
-                <a:spcPts val="800"/>
+                <a:spcPts val="1200"/>
               </a:spcBef>
-              <a:defRPr sz="1300" b="1">
+              <a:defRPr sz="1600" b="1">
                 <a:solidFill>
                   <a:srgbClr val="0F172A"/>
                 </a:solidFill>
               </a:defRPr>
             </a:pPr>
             <a:r>
-              <a:t>• Deterministic Exclusion:</a:t>
-            </a:r>
-          </a:p>
-          <a:p>
-            <a:pPr>
-              <a:defRPr sz="1200">
-                <a:solidFill>
-                  <a:srgbClr val="475569"/>
-                </a:solidFill>
-              </a:defRPr>
-            </a:pPr>
-            <a:r>
-              <a:t>   Strict Python filters unconditionally strip items containing user allergens.</a:t>
+              <a:t>• Allergen Exclusion:</a:t>
+            </a:r>
+          </a:p>
+          <a:p>
+            <a:pPr>
+              <a:defRPr sz="1400">
+                <a:solidFill>
+                  <a:srgbClr val="1E293B"/>
+                </a:solidFill>
+              </a:defRPr>
+            </a:pPr>
+            <a:r>
+              <a:t>   Automatically eliminates drinks matching customer allergies.</a:t>
             </a:r>
           </a:p>
           <a:p>
             <a:pPr>
               <a:spcBef>
-                <a:spcPts val="800"/>
+                <a:spcPts val="1200"/>
               </a:spcBef>
-              <a:defRPr sz="1300" b="1">
+              <a:defRPr sz="1600" b="1">
                 <a:solidFill>
                   <a:srgbClr val="0F172A"/>
                 </a:solidFill>
               </a:defRPr>
             </a:pPr>
             <a:r>
-              <a:t>• Zero Hallucinations:</a:t>
-            </a:r>
-          </a:p>
-          <a:p>
-            <a:pPr>
-              <a:defRPr sz="1200">
-                <a:solidFill>
-                  <a:srgbClr val="475569"/>
-                </a:solidFill>
-              </a:defRPr>
-            </a:pPr>
-            <a:r>
-              <a:t>   Menu item names and prices strictly verified against active database rows.</a:t>
+              <a:t>• Safe Menu Filtering:</a:t>
+            </a:r>
+          </a:p>
+          <a:p>
+            <a:pPr>
+              <a:defRPr sz="1400">
+                <a:solidFill>
+                  <a:srgbClr val="1E293B"/>
+                </a:solidFill>
+              </a:defRPr>
+            </a:pPr>
+            <a:r>
+              <a:t>   Customers allergic to dairy never receive milk drink suggestions.</a:t>
             </a:r>
           </a:p>
           <a:p>
             <a:pPr>
               <a:spcBef>
-                <a:spcPts val="800"/>
+                <a:spcPts val="1200"/>
               </a:spcBef>
-              <a:defRPr sz="1300" b="1">
+              <a:defRPr sz="1600" b="1">
                 <a:solidFill>
                   <a:srgbClr val="0F172A"/>
                 </a:solidFill>
               </a:defRPr>
             </a:pPr>
             <a:r>
-              <a:t>• 100% Verification:</a:t>
-            </a:r>
-          </a:p>
-          <a:p>
-            <a:pPr>
-              <a:defRPr sz="1200">
-                <a:solidFill>
-                  <a:srgbClr val="475569"/>
-                </a:solidFill>
-              </a:defRPr>
-            </a:pPr>
-            <a:r>
-              <a:t>   Backed by allergen test suite with 100% pass rate in CI/CD pipeline.</a:t>
+              <a:t>• 100% Tested:</a:t>
+            </a:r>
+          </a:p>
+          <a:p>
+            <a:pPr>
+              <a:defRPr sz="1400">
+                <a:solidFill>
+                  <a:srgbClr val="1E293B"/>
+                </a:solidFill>
+              </a:defRPr>
+            </a:pPr>
+            <a:r>
+              <a:t>   Validated by comprehensive automated test suites.</a:t>
             </a:r>
           </a:p>
         </p:txBody>
@@ -8285,7 +8228,7 @@
             <a:avLst/>
           </a:prstGeom>
           <a:solidFill>
-            <a:srgbClr val="FFFFFF"/>
+            <a:srgbClr val="F8FAFC"/>
           </a:solidFill>
           <a:ln w="19050">
             <a:solidFill>
@@ -8324,7 +8267,7 @@
         <p:spPr>
           <a:xfrm>
             <a:off x="8046720" y="1828800"/>
-            <a:ext cx="3383280" cy="73152"/>
+            <a:ext cx="3383280" cy="91440"/>
           </a:xfrm>
           <a:prstGeom prst="rect">
             <a:avLst/>
@@ -8366,8 +8309,8 @@
         </p:nvSpPr>
         <p:spPr>
           <a:xfrm>
-            <a:off x="8275320" y="1965960"/>
-            <a:ext cx="2926080" cy="4023360"/>
+            <a:off x="8275320" y="2057400"/>
+            <a:ext cx="2926080" cy="3931920"/>
           </a:xfrm>
           <a:prstGeom prst="rect">
             <a:avLst/>
@@ -8381,110 +8324,122 @@
           <a:lstStyle/>
           <a:p>
             <a:pPr>
-              <a:defRPr sz="1700" b="1">
+              <a:defRPr sz="2100" b="1">
                 <a:solidFill>
                   <a:srgbClr val="047857"/>
                 </a:solidFill>
               </a:defRPr>
             </a:pPr>
             <a:r>
-              <a:t>3. Two-Stage Human Approval</a:t>
+              <a:t>3. Human Confirmation</a:t>
             </a:r>
           </a:p>
           <a:p>
             <a:pPr>
               <a:spcBef>
-                <a:spcPts val="600"/>
+                <a:spcPts val="1200"/>
               </a:spcBef>
-              <a:defRPr sz="1200">
-                <a:solidFill>
-                  <a:srgbClr val="475569"/>
-                </a:solidFill>
-              </a:defRPr>
-            </a:pPr>
-            <a:r>
-              <a:t>Irreversible or sensitive database actions mandate explicit user confirmation:</a:t>
+              <a:defRPr sz="1600" b="1">
+                <a:solidFill>
+                  <a:srgbClr val="0F172A"/>
+                </a:solidFill>
+              </a:defRPr>
+            </a:pPr>
+            <a:r>
+              <a:t>• Order Preview Gate:</a:t>
+            </a:r>
+          </a:p>
+          <a:p>
+            <a:pPr>
+              <a:defRPr sz="1400">
+                <a:solidFill>
+                  <a:srgbClr val="1E293B"/>
+                </a:solidFill>
+              </a:defRPr>
+            </a:pPr>
+            <a:r>
+              <a:t>   Orders are only placed after the customer clicks Confirm.</a:t>
             </a:r>
           </a:p>
           <a:p>
             <a:pPr>
               <a:spcBef>
-                <a:spcPts val="800"/>
+                <a:spcPts val="1200"/>
               </a:spcBef>
-              <a:defRPr sz="1300" b="1">
+              <a:defRPr sz="1600" b="1">
                 <a:solidFill>
                   <a:srgbClr val="0F172A"/>
                 </a:solidFill>
               </a:defRPr>
             </a:pPr>
             <a:r>
-              <a:t>• Gate 1: Order Placement:</a:t>
-            </a:r>
-          </a:p>
-          <a:p>
-            <a:pPr>
-              <a:defRPr sz="1200">
-                <a:solidFill>
-                  <a:srgbClr val="475569"/>
-                </a:solidFill>
-              </a:defRPr>
-            </a:pPr>
-            <a:r>
-              <a:t>   The agent only stages 'pending' orders; user must tap Confirm to charge/place.</a:t>
+              <a:t>• Profile Update Gate:</a:t>
+            </a:r>
+          </a:p>
+          <a:p>
+            <a:pPr>
+              <a:defRPr sz="1400">
+                <a:solidFill>
+                  <a:srgbClr val="1E293B"/>
+                </a:solidFill>
+              </a:defRPr>
+            </a:pPr>
+            <a:r>
+              <a:t>   Changes to taste or address require explicit customer approval.</a:t>
             </a:r>
           </a:p>
           <a:p>
             <a:pPr>
               <a:spcBef>
-                <a:spcPts val="800"/>
+                <a:spcPts val="1200"/>
               </a:spcBef>
-              <a:defRPr sz="1300" b="1">
+              <a:defRPr sz="1600" b="1">
                 <a:solidFill>
                   <a:srgbClr val="0F172A"/>
                 </a:solidFill>
               </a:defRPr>
             </a:pPr>
             <a:r>
-              <a:t>• Gate 2: Profile Changes:</a:t>
-            </a:r>
-          </a:p>
-          <a:p>
-            <a:pPr>
-              <a:defRPr sz="1200">
-                <a:solidFill>
-                  <a:srgbClr val="475569"/>
-                </a:solidFill>
-              </a:defRPr>
-            </a:pPr>
-            <a:r>
-              <a:t>   Updates write to PendingPreferenceChange; user confirms before DB overwrite.</a:t>
+              <a:t>• Read-Only Agility:</a:t>
+            </a:r>
+          </a:p>
+          <a:p>
+            <a:pPr>
+              <a:defRPr sz="1400">
+                <a:solidFill>
+                  <a:srgbClr val="1E293B"/>
+                </a:solidFill>
+              </a:defRPr>
+            </a:pPr>
+            <a:r>
+              <a:t>   Instant menu suggestions with safe confirmation on key actions.</a:t>
             </a:r>
           </a:p>
           <a:p>
             <a:pPr>
               <a:spcBef>
-                <a:spcPts val="800"/>
+                <a:spcPts val="1200"/>
               </a:spcBef>
-              <a:defRPr sz="1300" b="1">
+              <a:defRPr sz="1600" b="1">
                 <a:solidFill>
                   <a:srgbClr val="0F172A"/>
                 </a:solidFill>
               </a:defRPr>
             </a:pPr>
             <a:r>
-              <a:t>• Read-Only Agility:</a:t>
-            </a:r>
-          </a:p>
-          <a:p>
-            <a:pPr>
-              <a:defRPr sz="1200">
-                <a:solidFill>
-                  <a:srgbClr val="475569"/>
-                </a:solidFill>
-              </a:defRPr>
-            </a:pPr>
-            <a:r>
-              <a:t>   Only read-only recommendations execute immediately without approval gates.</a:t>
+              <a:t>• Zero Surprises:</a:t>
+            </a:r>
+          </a:p>
+          <a:p>
+            <a:pPr>
+              <a:defRPr sz="1400">
+                <a:solidFill>
+                  <a:srgbClr val="1E293B"/>
+                </a:solidFill>
+              </a:defRPr>
+            </a:pPr>
+            <a:r>
+              <a:t>   Customers maintain complete control over orders and personal data.</a:t>
             </a:r>
           </a:p>
         </p:txBody>
@@ -8522,7 +8477,7 @@
             <a:avLst/>
           </a:prstGeom>
           <a:solidFill>
-            <a:srgbClr val="F8FAFC"/>
+            <a:srgbClr val="FFFFFF"/>
           </a:solidFill>
           <a:ln>
             <a:noFill/>
@@ -8573,14 +8528,14 @@
           <a:lstStyle/>
           <a:p>
             <a:pPr>
-              <a:defRPr sz="1000">
-                <a:solidFill>
-                  <a:srgbClr val="94A3B8"/>
-                </a:solidFill>
-              </a:defRPr>
-            </a:pPr>
-            <a:r>
-              <a:t>DrinkBot MLOps • TMA Solutions F&amp;B AI Workshop 2026 • Backend Architecture Review</a:t>
+              <a:defRPr sz="1100">
+                <a:solidFill>
+                  <a:srgbClr val="64748B"/>
+                </a:solidFill>
+              </a:defRPr>
+            </a:pPr>
+            <a:r>
+              <a:t>DrinkBot MLOps • F&amp;B AI Assistant &amp; Management Platform</a:t>
             </a:r>
           </a:p>
         </p:txBody>
@@ -8593,8 +8548,8 @@
         </p:nvSpPr>
         <p:spPr>
           <a:xfrm>
-            <a:off x="731520" y="384048"/>
-            <a:ext cx="2926080" cy="292608"/>
+            <a:off x="731520" y="365760"/>
+            <a:ext cx="2560320" cy="320040"/>
           </a:xfrm>
           <a:prstGeom prst="roundRect">
             <a:avLst/>
@@ -8627,14 +8582,14 @@
           <a:lstStyle/>
           <a:p>
             <a:pPr algn="ctr">
-              <a:defRPr sz="1000" b="1">
+              <a:defRPr sz="1100" b="1">
                 <a:solidFill>
                   <a:srgbClr val="78350F"/>
                 </a:solidFill>
               </a:defRPr>
             </a:pPr>
             <a:r>
-              <a:t>● PROMPT ENGINEERING &amp; MLOPS</a:t>
+              <a:t>PROMPT MANAGEMENT</a:t>
             </a:r>
           </a:p>
         </p:txBody>
@@ -8647,7 +8602,7 @@
         </p:nvSpPr>
         <p:spPr>
           <a:xfrm>
-            <a:off x="731520" y="713232"/>
+            <a:off x="731520" y="731520"/>
             <a:ext cx="10728655" cy="594360"/>
           </a:xfrm>
           <a:prstGeom prst="rect">
@@ -8662,14 +8617,14 @@
           <a:lstStyle/>
           <a:p>
             <a:pPr>
-              <a:defRPr sz="2600" b="1">
+              <a:defRPr sz="3200" b="1">
                 <a:solidFill>
                   <a:srgbClr val="0F172A"/>
                 </a:solidFill>
               </a:defRPr>
             </a:pPr>
             <a:r>
-              <a:t>Database-Backed Prompt Versioning &amp; Instant Rollback</a:t>
+              <a:t>Database-Backed Prompt Version Control</a:t>
             </a:r>
           </a:p>
         </p:txBody>
@@ -8682,8 +8637,8 @@
         </p:nvSpPr>
         <p:spPr>
           <a:xfrm>
-            <a:off x="731520" y="1298448"/>
-            <a:ext cx="10728655" cy="365760"/>
+            <a:off x="731520" y="1325880"/>
+            <a:ext cx="10728655" cy="411480"/>
           </a:xfrm>
           <a:prstGeom prst="rect">
             <a:avLst/>
@@ -8697,14 +8652,14 @@
           <a:lstStyle/>
           <a:p>
             <a:pPr>
-              <a:defRPr sz="1300">
-                <a:solidFill>
-                  <a:srgbClr val="475569"/>
-                </a:solidFill>
-              </a:defRPr>
-            </a:pPr>
-            <a:r>
-              <a:t>Eliminating hardcoded templates with an audited, zero-downtime prompt management system.</a:t>
+              <a:defRPr sz="1500">
+                <a:solidFill>
+                  <a:srgbClr val="64748B"/>
+                </a:solidFill>
+              </a:defRPr>
+            </a:pPr>
+            <a:r>
+              <a:t>Managing AI instructions dynamically without server redeployments.</a:t>
             </a:r>
           </a:p>
         </p:txBody>
@@ -8724,7 +8679,7 @@
             <a:avLst/>
           </a:prstGeom>
           <a:solidFill>
-            <a:srgbClr val="FFFFFF"/>
+            <a:srgbClr val="F8FAFC"/>
           </a:solidFill>
           <a:ln w="19050">
             <a:solidFill>
@@ -8763,7 +8718,7 @@
         <p:spPr>
           <a:xfrm>
             <a:off x="731520" y="1828800"/>
-            <a:ext cx="5212080" cy="73152"/>
+            <a:ext cx="5212080" cy="91440"/>
           </a:xfrm>
           <a:prstGeom prst="rect">
             <a:avLst/>
@@ -8805,8 +8760,8 @@
         </p:nvSpPr>
         <p:spPr>
           <a:xfrm>
-            <a:off x="960120" y="2011680"/>
-            <a:ext cx="4754880" cy="3931920"/>
+            <a:off x="1005840" y="2057400"/>
+            <a:ext cx="4663440" cy="3931920"/>
           </a:xfrm>
           <a:prstGeom prst="rect">
             <a:avLst/>
@@ -8820,122 +8775,122 @@
           <a:lstStyle/>
           <a:p>
             <a:pPr>
-              <a:defRPr sz="1800" b="1">
+              <a:defRPr sz="2400" b="1">
                 <a:solidFill>
                   <a:srgbClr val="0284C7"/>
                 </a:solidFill>
               </a:defRPr>
             </a:pPr>
             <a:r>
-              <a:t>Relational Prompt Store &amp; Drift Detection</a:t>
+              <a:t>Centralized Prompt Storage</a:t>
             </a:r>
           </a:p>
           <a:p>
             <a:pPr>
               <a:spcBef>
-                <a:spcPts val="1000"/>
+                <a:spcPts val="1400"/>
               </a:spcBef>
-              <a:defRPr sz="1400" b="1">
+              <a:defRPr sz="1700" b="1">
                 <a:solidFill>
                   <a:srgbClr val="0F172A"/>
                 </a:solidFill>
               </a:defRPr>
             </a:pPr>
             <a:r>
-              <a:t>✔ Semantic Versioning (SemVer)</a:t>
-            </a:r>
-          </a:p>
-          <a:p>
-            <a:pPr>
-              <a:defRPr sz="1200">
-                <a:solidFill>
-                  <a:srgbClr val="475569"/>
-                </a:solidFill>
-              </a:defRPr>
-            </a:pPr>
-            <a:r>
-              <a:t>   Prompts tracked by name and version (e.g. 'drink-assistant-system' @ v1.2.0).</a:t>
+              <a:t>✔ Database Storage:</a:t>
+            </a:r>
+          </a:p>
+          <a:p>
+            <a:pPr>
+              <a:defRPr sz="1500">
+                <a:solidFill>
+                  <a:srgbClr val="1E293B"/>
+                </a:solidFill>
+              </a:defRPr>
+            </a:pPr>
+            <a:r>
+              <a:t>   Prompts saved in database tables, replacing hardcoded text in code.</a:t>
             </a:r>
           </a:p>
           <a:p>
             <a:pPr>
               <a:spcBef>
-                <a:spcPts val="1000"/>
+                <a:spcPts val="1400"/>
               </a:spcBef>
-              <a:defRPr sz="1400" b="1">
+              <a:defRPr sz="1700" b="1">
                 <a:solidFill>
                   <a:srgbClr val="0F172A"/>
                 </a:solidFill>
               </a:defRPr>
             </a:pPr>
             <a:r>
-              <a:t>✔ SHA-256 Hash Drift Detection</a:t>
-            </a:r>
-          </a:p>
-          <a:p>
-            <a:pPr>
-              <a:defRPr sz="1200">
-                <a:solidFill>
-                  <a:srgbClr val="475569"/>
-                </a:solidFill>
-              </a:defRPr>
-            </a:pPr>
-            <a:r>
-              <a:t>   Automatic 12-char cryptographic hash computed on template to detect silent drift.</a:t>
+              <a:t>✔ Clear Version History:</a:t>
+            </a:r>
+          </a:p>
+          <a:p>
+            <a:pPr>
+              <a:defRPr sz="1500">
+                <a:solidFill>
+                  <a:srgbClr val="1E293B"/>
+                </a:solidFill>
+              </a:defRPr>
+            </a:pPr>
+            <a:r>
+              <a:t>   Organized versioning (v1.0, v1.1, v1.2) with authors and timestamps.</a:t>
             </a:r>
           </a:p>
           <a:p>
             <a:pPr>
               <a:spcBef>
-                <a:spcPts val="1000"/>
+                <a:spcPts val="1400"/>
               </a:spcBef>
-              <a:defRPr sz="1400" b="1">
+              <a:defRPr sz="1700" b="1">
                 <a:solidFill>
                   <a:srgbClr val="0F172A"/>
                 </a:solidFill>
               </a:defRPr>
             </a:pPr>
             <a:r>
-              <a:t>✔ Template Pre-Validation</a:t>
-            </a:r>
-          </a:p>
-          <a:p>
-            <a:pPr>
-              <a:defRPr sz="1200">
-                <a:solidFill>
-                  <a:srgbClr val="475569"/>
-                </a:solidFill>
-              </a:defRPr>
-            </a:pPr>
-            <a:r>
-              <a:t>   Ensures required interpolation fields ({name}, {profile_json}) exist before committing.</a:t>
+              <a:t>✔ Template Verification:</a:t>
+            </a:r>
+          </a:p>
+          <a:p>
+            <a:pPr>
+              <a:defRPr sz="1500">
+                <a:solidFill>
+                  <a:srgbClr val="1E293B"/>
+                </a:solidFill>
+              </a:defRPr>
+            </a:pPr>
+            <a:r>
+              <a:t>   Validates required fields before publishing to prevent errors.</a:t>
             </a:r>
           </a:p>
           <a:p>
             <a:pPr>
               <a:spcBef>
-                <a:spcPts val="1000"/>
+                <a:spcPts val="1400"/>
               </a:spcBef>
-              <a:defRPr sz="1400" b="1">
+              <a:defRPr sz="1700" b="1">
                 <a:solidFill>
                   <a:srgbClr val="0F172A"/>
                 </a:solidFill>
               </a:defRPr>
             </a:pPr>
             <a:r>
-              <a:t>✔ Telemetry Correlation</a:t>
-            </a:r>
-          </a:p>
-          <a:p>
-            <a:pPr>
-              <a:defRPr sz="1200">
-                <a:solidFill>
-                  <a:srgbClr val="475569"/>
-                </a:solidFill>
-              </a:defRPr>
-            </a:pPr>
-            <a:r>
-              <a:t>   Every LLM invocation logs prompt_version &amp; prompt_hash for exact response audits.</a:t>
+              <a:t>✔ Audit Tracking:</a:t>
+            </a:r>
+          </a:p>
+          <a:p>
+            <a:pPr>
+              <a:defRPr sz="1500">
+                <a:solidFill>
+                  <a:srgbClr val="1E293B"/>
+                </a:solidFill>
+              </a:defRPr>
+            </a:pPr>
+            <a:r>
+              <a:t>   Every AI response records the exact prompt version used.</a:t>
             </a:r>
           </a:p>
         </p:txBody>
@@ -8955,7 +8910,7 @@
             <a:avLst/>
           </a:prstGeom>
           <a:solidFill>
-            <a:srgbClr val="FFFFFF"/>
+            <a:srgbClr val="F8FAFC"/>
           </a:solidFill>
           <a:ln w="19050">
             <a:solidFill>
@@ -8994,13 +8949,13 @@
         <p:spPr>
           <a:xfrm>
             <a:off x="6217920" y="1828800"/>
-            <a:ext cx="5212080" cy="73152"/>
+            <a:ext cx="5212080" cy="91440"/>
           </a:xfrm>
           <a:prstGeom prst="rect">
             <a:avLst/>
           </a:prstGeom>
           <a:solidFill>
-            <a:srgbClr val="B45309"/>
+            <a:srgbClr val="D97706"/>
           </a:solidFill>
           <a:ln>
             <a:noFill/>
@@ -9036,8 +8991,8 @@
         </p:nvSpPr>
         <p:spPr>
           <a:xfrm>
-            <a:off x="6446520" y="2011680"/>
-            <a:ext cx="4754880" cy="3931920"/>
+            <a:off x="6492240" y="2057400"/>
+            <a:ext cx="4663440" cy="3931920"/>
           </a:xfrm>
           <a:prstGeom prst="rect">
             <a:avLst/>
@@ -9051,122 +9006,122 @@
           <a:lstStyle/>
           <a:p>
             <a:pPr>
-              <a:defRPr sz="1800" b="1">
-                <a:solidFill>
-                  <a:srgbClr val="B45309"/>
-                </a:solidFill>
-              </a:defRPr>
-            </a:pPr>
-            <a:r>
-              <a:t>Admin Endpoints &amp; Zero-Downtime Hot Swap</a:t>
+              <a:defRPr sz="2400" b="1">
+                <a:solidFill>
+                  <a:srgbClr val="D97706"/>
+                </a:solidFill>
+              </a:defRPr>
+            </a:pPr>
+            <a:r>
+              <a:t>Instant Rollback &amp; Updates</a:t>
             </a:r>
           </a:p>
           <a:p>
             <a:pPr>
               <a:spcBef>
-                <a:spcPts val="1000"/>
+                <a:spcPts val="1400"/>
               </a:spcBef>
-              <a:defRPr sz="1400" b="1">
+              <a:defRPr sz="1700" b="1">
                 <a:solidFill>
                   <a:srgbClr val="78350F"/>
                 </a:solidFill>
               </a:defRPr>
             </a:pPr>
             <a:r>
-              <a:t>▶ POST /api/prompts</a:t>
-            </a:r>
-          </a:p>
-          <a:p>
-            <a:pPr>
-              <a:defRPr sz="1200">
-                <a:solidFill>
-                  <a:srgbClr val="475569"/>
-                </a:solidFill>
-              </a:defRPr>
-            </a:pPr>
-            <a:r>
-              <a:t>   Publishes a new prompt version and validates syntax without redeploying code.</a:t>
+              <a:t>▶ Live Updates:</a:t>
+            </a:r>
+          </a:p>
+          <a:p>
+            <a:pPr>
+              <a:defRPr sz="1500">
+                <a:solidFill>
+                  <a:srgbClr val="1E293B"/>
+                </a:solidFill>
+              </a:defRPr>
+            </a:pPr>
+            <a:r>
+              <a:t>   Publish improved prompt guidelines directly to live users.</a:t>
             </a:r>
           </a:p>
           <a:p>
             <a:pPr>
               <a:spcBef>
-                <a:spcPts val="1000"/>
+                <a:spcPts val="1400"/>
               </a:spcBef>
-              <a:defRPr sz="1400" b="1">
+              <a:defRPr sz="1700" b="1">
                 <a:solidFill>
                   <a:srgbClr val="78350F"/>
                 </a:solidFill>
               </a:defRPr>
             </a:pPr>
             <a:r>
-              <a:t>▶ GET /api/prompts?name=...</a:t>
-            </a:r>
-          </a:p>
-          <a:p>
-            <a:pPr>
-              <a:defRPr sz="1200">
-                <a:solidFill>
-                  <a:srgbClr val="475569"/>
-                </a:solidFill>
-              </a:defRPr>
-            </a:pPr>
-            <a:r>
-              <a:t>   Inspects complete version history, authors, and previous release notes.</a:t>
+              <a:t>▶ One-Click Rollback:</a:t>
+            </a:r>
+          </a:p>
+          <a:p>
+            <a:pPr>
+              <a:defRPr sz="1500">
+                <a:solidFill>
+                  <a:srgbClr val="1E293B"/>
+                </a:solidFill>
+              </a:defRPr>
+            </a:pPr>
+            <a:r>
+              <a:t>   Instantly revert to a previous prompt version if needed.</a:t>
             </a:r>
           </a:p>
           <a:p>
             <a:pPr>
               <a:spcBef>
-                <a:spcPts val="1000"/>
+                <a:spcPts val="1400"/>
               </a:spcBef>
-              <a:defRPr sz="1400" b="1">
+              <a:defRPr sz="1700" b="1">
                 <a:solidFill>
                   <a:srgbClr val="78350F"/>
                 </a:solidFill>
               </a:defRPr>
             </a:pPr>
             <a:r>
-              <a:t>▶ POST /api/prompts/{id}/activate</a:t>
-            </a:r>
-          </a:p>
-          <a:p>
-            <a:pPr>
-              <a:defRPr sz="1200">
-                <a:solidFill>
-                  <a:srgbClr val="475569"/>
-                </a:solidFill>
-              </a:defRPr>
-            </a:pPr>
-            <a:r>
-              <a:t>   Instant hot-swap: Activates target version and deactivates prior rows atomically.</a:t>
+              <a:t>▶ Zero Downtime:</a:t>
+            </a:r>
+          </a:p>
+          <a:p>
+            <a:pPr>
+              <a:defRPr sz="1500">
+                <a:solidFill>
+                  <a:srgbClr val="1E293B"/>
+                </a:solidFill>
+              </a:defRPr>
+            </a:pPr>
+            <a:r>
+              <a:t>   Update AI behavior without restarting backend servers.</a:t>
             </a:r>
           </a:p>
           <a:p>
             <a:pPr>
               <a:spcBef>
-                <a:spcPts val="1000"/>
+                <a:spcPts val="1400"/>
               </a:spcBef>
-              <a:defRPr sz="1400" b="1">
+              <a:defRPr sz="1700" b="1">
                 <a:solidFill>
                   <a:srgbClr val="78350F"/>
                 </a:solidFill>
               </a:defRPr>
             </a:pPr>
             <a:r>
-              <a:t>▶ Instant Rollback &amp; A/B Testing</a:t>
-            </a:r>
-          </a:p>
-          <a:p>
-            <a:pPr>
-              <a:defRPr sz="1200">
-                <a:solidFill>
-                  <a:srgbClr val="475569"/>
-                </a:solidFill>
-              </a:defRPr>
-            </a:pPr>
-            <a:r>
-              <a:t>   Enables real-time canary deployments, rollbacks, and prompt experiments on live traffic.</a:t>
+              <a:t>▶ Safe A/B Testing:</a:t>
+            </a:r>
+          </a:p>
+          <a:p>
+            <a:pPr>
+              <a:defRPr sz="1500">
+                <a:solidFill>
+                  <a:srgbClr val="1E293B"/>
+                </a:solidFill>
+              </a:defRPr>
+            </a:pPr>
+            <a:r>
+              <a:t>   Test seasonal promotional prompts safely on live traffic.</a:t>
             </a:r>
           </a:p>
         </p:txBody>
@@ -9204,7 +9159,7 @@
             <a:avLst/>
           </a:prstGeom>
           <a:solidFill>
-            <a:srgbClr val="F8FAFC"/>
+            <a:srgbClr val="FFFFFF"/>
           </a:solidFill>
           <a:ln>
             <a:noFill/>
@@ -9255,14 +9210,14 @@
           <a:lstStyle/>
           <a:p>
             <a:pPr>
-              <a:defRPr sz="1000">
-                <a:solidFill>
-                  <a:srgbClr val="94A3B8"/>
-                </a:solidFill>
-              </a:defRPr>
-            </a:pPr>
-            <a:r>
-              <a:t>DrinkBot MLOps • TMA Solutions F&amp;B AI Workshop 2026 • Backend Architecture Review</a:t>
+              <a:defRPr sz="1100">
+                <a:solidFill>
+                  <a:srgbClr val="64748B"/>
+                </a:solidFill>
+              </a:defRPr>
+            </a:pPr>
+            <a:r>
+              <a:t>DrinkBot MLOps • F&amp;B AI Assistant &amp; Management Platform</a:t>
             </a:r>
           </a:p>
         </p:txBody>
@@ -9275,8 +9230,8 @@
         </p:nvSpPr>
         <p:spPr>
           <a:xfrm>
-            <a:off x="731520" y="384048"/>
-            <a:ext cx="2926080" cy="292608"/>
+            <a:off x="731520" y="365760"/>
+            <a:ext cx="2560320" cy="320040"/>
           </a:xfrm>
           <a:prstGeom prst="roundRect">
             <a:avLst/>
@@ -9309,14 +9264,14 @@
           <a:lstStyle/>
           <a:p>
             <a:pPr algn="ctr">
-              <a:defRPr sz="1000" b="1">
+              <a:defRPr sz="1100" b="1">
                 <a:solidFill>
                   <a:srgbClr val="78350F"/>
                 </a:solidFill>
               </a:defRPr>
             </a:pPr>
             <a:r>
-              <a:t>● INFERENCE INFRASTRUCTURE</a:t>
+              <a:t>RELIABILITY &amp; COSTS</a:t>
             </a:r>
           </a:p>
         </p:txBody>
@@ -9329,7 +9284,7 @@
         </p:nvSpPr>
         <p:spPr>
           <a:xfrm>
-            <a:off x="731520" y="713232"/>
+            <a:off x="731520" y="731520"/>
             <a:ext cx="10728655" cy="594360"/>
           </a:xfrm>
           <a:prstGeom prst="rect">
@@ -9344,14 +9299,14 @@
           <a:lstStyle/>
           <a:p>
             <a:pPr>
-              <a:defRPr sz="2600" b="1">
+              <a:defRPr sz="3200" b="1">
                 <a:solidFill>
                   <a:srgbClr val="0F172A"/>
                 </a:solidFill>
               </a:defRPr>
             </a:pPr>
             <a:r>
-              <a:t>Multi-Engine Resilience &amp; Granular Observability</a:t>
+              <a:t>High Availability &amp; Operational Cost Tracking</a:t>
             </a:r>
           </a:p>
         </p:txBody>
@@ -9364,8 +9319,8 @@
         </p:nvSpPr>
         <p:spPr>
           <a:xfrm>
-            <a:off x="731520" y="1298448"/>
-            <a:ext cx="10728655" cy="365760"/>
+            <a:off x="731520" y="1325880"/>
+            <a:ext cx="10728655" cy="411480"/>
           </a:xfrm>
           <a:prstGeom prst="rect">
             <a:avLst/>
@@ -9379,14 +9334,14 @@
           <a:lstStyle/>
           <a:p>
             <a:pPr>
-              <a:defRPr sz="1300">
-                <a:solidFill>
-                  <a:srgbClr val="475569"/>
-                </a:solidFill>
-              </a:defRPr>
-            </a:pPr>
-            <a:r>
-              <a:t>Ensuring 24/7 chatbot availability with zero-cost local fallback and full cost auditing.</a:t>
+              <a:defRPr sz="1500">
+                <a:solidFill>
+                  <a:srgbClr val="64748B"/>
+                </a:solidFill>
+              </a:defRPr>
+            </a:pPr>
+            <a:r>
+              <a:t>Ensuring 24/7 service uptime with complete visibility into AI expenses.</a:t>
             </a:r>
           </a:p>
         </p:txBody>
@@ -9406,7 +9361,7 @@
             <a:avLst/>
           </a:prstGeom>
           <a:solidFill>
-            <a:srgbClr val="FFFFFF"/>
+            <a:srgbClr val="F8FAFC"/>
           </a:solidFill>
           <a:ln w="19050">
             <a:solidFill>
@@ -9445,13 +9400,13 @@
         <p:spPr>
           <a:xfrm>
             <a:off x="731520" y="1828800"/>
-            <a:ext cx="5212080" cy="73152"/>
+            <a:ext cx="5212080" cy="91440"/>
           </a:xfrm>
           <a:prstGeom prst="rect">
             <a:avLst/>
           </a:prstGeom>
           <a:solidFill>
-            <a:srgbClr val="B45309"/>
+            <a:srgbClr val="D97706"/>
           </a:solidFill>
           <a:ln>
             <a:noFill/>
@@ -9487,8 +9442,8 @@
         </p:nvSpPr>
         <p:spPr>
           <a:xfrm>
-            <a:off x="960120" y="2011680"/>
-            <a:ext cx="4754880" cy="3931920"/>
+            <a:off x="1005840" y="2057400"/>
+            <a:ext cx="4663440" cy="3931920"/>
           </a:xfrm>
           <a:prstGeom prst="rect">
             <a:avLst/>
@@ -9502,122 +9457,122 @@
           <a:lstStyle/>
           <a:p>
             <a:pPr>
-              <a:defRPr sz="1800" b="1">
-                <a:solidFill>
-                  <a:srgbClr val="B45309"/>
-                </a:solidFill>
-              </a:defRPr>
-            </a:pPr>
-            <a:r>
-              <a:t>High-Availability Multi-Engine Fallback</a:t>
+              <a:defRPr sz="2400" b="1">
+                <a:solidFill>
+                  <a:srgbClr val="D97706"/>
+                </a:solidFill>
+              </a:defRPr>
+            </a:pPr>
+            <a:r>
+              <a:t>Always-On AI Reliability</a:t>
             </a:r>
           </a:p>
           <a:p>
             <a:pPr>
               <a:spcBef>
-                <a:spcPts val="1000"/>
+                <a:spcPts val="1400"/>
               </a:spcBef>
-              <a:defRPr sz="1400" b="1">
+              <a:defRPr sz="1700" b="1">
                 <a:solidFill>
                   <a:srgbClr val="0F172A"/>
                 </a:solidFill>
               </a:defRPr>
             </a:pPr>
             <a:r>
-              <a:t>• Tier 1: Cloud Foundation Model</a:t>
-            </a:r>
-          </a:p>
-          <a:p>
-            <a:pPr>
-              <a:defRPr sz="1200">
-                <a:solidFill>
-                  <a:srgbClr val="475569"/>
-                </a:solidFill>
-              </a:defRPr>
-            </a:pPr>
-            <a:r>
-              <a:t>   Primary inference via OpenAI gpt-4o-mini or Gemini Flash for top reasoning.</a:t>
+              <a:t>• Primary Cloud AI:</a:t>
+            </a:r>
+          </a:p>
+          <a:p>
+            <a:pPr>
+              <a:defRPr sz="1500">
+                <a:solidFill>
+                  <a:srgbClr val="1E293B"/>
+                </a:solidFill>
+              </a:defRPr>
+            </a:pPr>
+            <a:r>
+              <a:t>   High-intelligence cloud model delivers rich conversational quality.</a:t>
             </a:r>
           </a:p>
           <a:p>
             <a:pPr>
               <a:spcBef>
-                <a:spcPts val="1000"/>
+                <a:spcPts val="1400"/>
               </a:spcBef>
-              <a:defRPr sz="1400" b="1">
+              <a:defRPr sz="1700" b="1">
                 <a:solidFill>
                   <a:srgbClr val="0F172A"/>
                 </a:solidFill>
               </a:defRPr>
             </a:pPr>
             <a:r>
-              <a:t>• Intelligent Failure Recovery</a:t>
-            </a:r>
-          </a:p>
-          <a:p>
-            <a:pPr>
-              <a:defRPr sz="1200">
-                <a:solidFill>
-                  <a:srgbClr val="475569"/>
-                </a:solidFill>
-              </a:defRPr>
-            </a:pPr>
-            <a:r>
-              <a:t>   Catches quota exhaustion, network timeouts, or missing API keys automatically.</a:t>
+              <a:t>• Auto-Fallback Protection:</a:t>
+            </a:r>
+          </a:p>
+          <a:p>
+            <a:pPr>
+              <a:defRPr sz="1500">
+                <a:solidFill>
+                  <a:srgbClr val="1E293B"/>
+                </a:solidFill>
+              </a:defRPr>
+            </a:pPr>
+            <a:r>
+              <a:t>   Automatically switches to local AI if internet or cloud APIs drop.</a:t>
             </a:r>
           </a:p>
           <a:p>
             <a:pPr>
               <a:spcBef>
-                <a:spcPts val="1000"/>
+                <a:spcPts val="1400"/>
               </a:spcBef>
-              <a:defRPr sz="1400" b="1">
+              <a:defRPr sz="1700" b="1">
                 <a:solidFill>
                   <a:srgbClr val="0F172A"/>
                 </a:solidFill>
               </a:defRPr>
             </a:pPr>
             <a:r>
-              <a:t>• Tier 2: Local Zero-Cost Ollama</a:t>
-            </a:r>
-          </a:p>
-          <a:p>
-            <a:pPr>
-              <a:defRPr sz="1200">
-                <a:solidFill>
-                  <a:srgbClr val="475569"/>
-                </a:solidFill>
-              </a:defRPr>
-            </a:pPr>
-            <a:r>
-              <a:t>   Auto-fails over to local Ollama (gemma4:e4b) connected within Docker network.</a:t>
+              <a:t>• Local Offline AI:</a:t>
+            </a:r>
+          </a:p>
+          <a:p>
+            <a:pPr>
+              <a:defRPr sz="1500">
+                <a:solidFill>
+                  <a:srgbClr val="1E293B"/>
+                </a:solidFill>
+              </a:defRPr>
+            </a:pPr>
+            <a:r>
+              <a:t>   Runs on local server hardware with zero ongoing API costs.</a:t>
             </a:r>
           </a:p>
           <a:p>
             <a:pPr>
               <a:spcBef>
-                <a:spcPts val="1000"/>
+                <a:spcPts val="1400"/>
               </a:spcBef>
-              <a:defRPr sz="1400" b="1">
+              <a:defRPr sz="1700" b="1">
                 <a:solidFill>
                   <a:srgbClr val="0F172A"/>
                 </a:solidFill>
               </a:defRPr>
             </a:pPr>
             <a:r>
-              <a:t>• Business Continuity Guarantee</a:t>
-            </a:r>
-          </a:p>
-          <a:p>
-            <a:pPr>
-              <a:defRPr sz="1200">
-                <a:solidFill>
-                  <a:srgbClr val="475569"/>
-                </a:solidFill>
-              </a:defRPr>
-            </a:pPr>
-            <a:r>
-              <a:t>   Ensures customers never see a blank crash screen; capable of running 100% offline.</a:t>
+              <a:t>• Uninterrupted Service:</a:t>
+            </a:r>
+          </a:p>
+          <a:p>
+            <a:pPr>
+              <a:defRPr sz="1500">
+                <a:solidFill>
+                  <a:srgbClr val="1E293B"/>
+                </a:solidFill>
+              </a:defRPr>
+            </a:pPr>
+            <a:r>
+              <a:t>   Customers never see an outage or blank screen during peak hours.</a:t>
             </a:r>
           </a:p>
         </p:txBody>
@@ -9637,7 +9592,7 @@
             <a:avLst/>
           </a:prstGeom>
           <a:solidFill>
-            <a:srgbClr val="FFFFFF"/>
+            <a:srgbClr val="F8FAFC"/>
           </a:solidFill>
           <a:ln w="19050">
             <a:solidFill>
@@ -9676,13 +9631,13 @@
         <p:spPr>
           <a:xfrm>
             <a:off x="6217920" y="1828800"/>
-            <a:ext cx="5212080" cy="73152"/>
+            <a:ext cx="5212080" cy="91440"/>
           </a:xfrm>
           <a:prstGeom prst="rect">
             <a:avLst/>
           </a:prstGeom>
           <a:solidFill>
-            <a:srgbClr val="4338CA"/>
+            <a:srgbClr val="4F46E5"/>
           </a:solidFill>
           <a:ln>
             <a:noFill/>
@@ -9718,8 +9673,8 @@
         </p:nvSpPr>
         <p:spPr>
           <a:xfrm>
-            <a:off x="6446520" y="2011680"/>
-            <a:ext cx="4754880" cy="3931920"/>
+            <a:off x="6492240" y="2057400"/>
+            <a:ext cx="4663440" cy="3931920"/>
           </a:xfrm>
           <a:prstGeom prst="rect">
             <a:avLst/>
@@ -9733,122 +9688,122 @@
           <a:lstStyle/>
           <a:p>
             <a:pPr>
-              <a:defRPr sz="1800" b="1">
-                <a:solidFill>
-                  <a:srgbClr val="4338CA"/>
-                </a:solidFill>
-              </a:defRPr>
-            </a:pPr>
-            <a:r>
-              <a:t>Structured JSON Logs &amp; Langfuse Tracing</a:t>
+              <a:defRPr sz="2400" b="1">
+                <a:solidFill>
+                  <a:srgbClr val="4F46E5"/>
+                </a:solidFill>
+              </a:defRPr>
+            </a:pPr>
+            <a:r>
+              <a:t>Cost &amp; Performance Auditing</a:t>
             </a:r>
           </a:p>
           <a:p>
             <a:pPr>
               <a:spcBef>
-                <a:spcPts val="1000"/>
+                <a:spcPts val="1400"/>
               </a:spcBef>
-              <a:defRPr sz="1400" b="1">
+              <a:defRPr sz="1700" b="1">
                 <a:solidFill>
                   <a:srgbClr val="0F172A"/>
                 </a:solidFill>
               </a:defRPr>
             </a:pPr>
             <a:r>
-              <a:t>• Per-Call Structured Telemetry</a:t>
-            </a:r>
-          </a:p>
-          <a:p>
-            <a:pPr>
-              <a:defRPr sz="1200">
-                <a:solidFill>
-                  <a:srgbClr val="475569"/>
-                </a:solidFill>
-              </a:defRPr>
-            </a:pPr>
-            <a:r>
-              <a:t>   Emits structured JSON with request_id, provider, model, latency_ms, success/error.</a:t>
+              <a:t>• Detailed Activity Logs:</a:t>
+            </a:r>
+          </a:p>
+          <a:p>
+            <a:pPr>
+              <a:defRPr sz="1500">
+                <a:solidFill>
+                  <a:srgbClr val="1E293B"/>
+                </a:solidFill>
+              </a:defRPr>
+            </a:pPr>
+            <a:r>
+              <a:t>   Every message logs response time, success status, and AI model used.</a:t>
             </a:r>
           </a:p>
           <a:p>
             <a:pPr>
               <a:spcBef>
-                <a:spcPts val="1000"/>
+                <a:spcPts val="1400"/>
               </a:spcBef>
-              <a:defRPr sz="1400" b="1">
+              <a:defRPr sz="1700" b="1">
                 <a:solidFill>
                   <a:srgbClr val="0F172A"/>
                 </a:solidFill>
               </a:defRPr>
             </a:pPr>
             <a:r>
-              <a:t>• Token &amp; Cost Accounting</a:t>
-            </a:r>
-          </a:p>
-          <a:p>
-            <a:pPr>
-              <a:defRPr sz="1200">
-                <a:solidFill>
-                  <a:srgbClr val="475569"/>
-                </a:solidFill>
-              </a:defRPr>
-            </a:pPr>
-            <a:r>
-              <a:t>   Calculates exact input_tokens, output_tokens, and estimated_cost_usd to 8 decimals.</a:t>
+              <a:t>• Real-Time Cost Tracking:</a:t>
+            </a:r>
+          </a:p>
+          <a:p>
+            <a:pPr>
+              <a:defRPr sz="1500">
+                <a:solidFill>
+                  <a:srgbClr val="1E293B"/>
+                </a:solidFill>
+              </a:defRPr>
+            </a:pPr>
+            <a:r>
+              <a:t>   Calculates exact token counts and costs to fractions of a cent.</a:t>
             </a:r>
           </a:p>
           <a:p>
             <a:pPr>
               <a:spcBef>
-                <a:spcPts val="1000"/>
+                <a:spcPts val="1400"/>
               </a:spcBef>
-              <a:defRPr sz="1400" b="1">
+              <a:defRPr sz="1700" b="1">
                 <a:solidFill>
                   <a:srgbClr val="0F172A"/>
                 </a:solidFill>
               </a:defRPr>
             </a:pPr>
             <a:r>
-              <a:t>• Database Row Persistence</a:t>
-            </a:r>
-          </a:p>
-          <a:p>
-            <a:pPr>
-              <a:defRPr sz="1200">
-                <a:solidFill>
-                  <a:srgbClr val="475569"/>
-                </a:solidFill>
-              </a:defRPr>
-            </a:pPr>
-            <a:r>
-              <a:t>   Usage metrics persisted directly into ChatMessage database columns for auditing.</a:t>
+              <a:t>• Database Accounting:</a:t>
+            </a:r>
+          </a:p>
+          <a:p>
+            <a:pPr>
+              <a:defRPr sz="1500">
+                <a:solidFill>
+                  <a:srgbClr val="1E293B"/>
+                </a:solidFill>
+              </a:defRPr>
+            </a:pPr>
+            <a:r>
+              <a:t>   Usage metrics saved alongside customer messages for cost auditing.</a:t>
             </a:r>
           </a:p>
           <a:p>
             <a:pPr>
               <a:spcBef>
-                <a:spcPts val="1000"/>
+                <a:spcPts val="1400"/>
               </a:spcBef>
-              <a:defRPr sz="1400" b="1">
+              <a:defRPr sz="1700" b="1">
                 <a:solidFill>
                   <a:srgbClr val="0F172A"/>
                 </a:solidFill>
               </a:defRPr>
             </a:pPr>
             <a:r>
-              <a:t>• Langfuse Tracing Integration</a:t>
-            </a:r>
-          </a:p>
-          <a:p>
-            <a:pPr>
-              <a:defRPr sz="1200">
-                <a:solidFill>
-                  <a:srgbClr val="475569"/>
-                </a:solidFill>
-              </a:defRPr>
-            </a:pPr>
-            <a:r>
-              <a:t>   Full end-to-end tracing showing agent thought process and tool execution times.</a:t>
+              <a:t>• Live Monitoring Dashboard:</a:t>
+            </a:r>
+          </a:p>
+          <a:p>
+            <a:pPr>
+              <a:defRPr sz="1500">
+                <a:solidFill>
+                  <a:srgbClr val="1E293B"/>
+                </a:solidFill>
+              </a:defRPr>
+            </a:pPr>
+            <a:r>
+              <a:t>   Provides end-to-end visibility into response speed and system health.</a:t>
             </a:r>
           </a:p>
         </p:txBody>
@@ -9886,7 +9841,7 @@
             <a:avLst/>
           </a:prstGeom>
           <a:solidFill>
-            <a:srgbClr val="F8FAFC"/>
+            <a:srgbClr val="FFFFFF"/>
           </a:solidFill>
           <a:ln>
             <a:noFill/>
@@ -9937,14 +9892,14 @@
           <a:lstStyle/>
           <a:p>
             <a:pPr>
-              <a:defRPr sz="1000">
-                <a:solidFill>
-                  <a:srgbClr val="94A3B8"/>
-                </a:solidFill>
-              </a:defRPr>
-            </a:pPr>
-            <a:r>
-              <a:t>DrinkBot MLOps • TMA Solutions F&amp;B AI Workshop 2026 • Backend Architecture Review</a:t>
+              <a:defRPr sz="1100">
+                <a:solidFill>
+                  <a:srgbClr val="64748B"/>
+                </a:solidFill>
+              </a:defRPr>
+            </a:pPr>
+            <a:r>
+              <a:t>DrinkBot MLOps • F&amp;B AI Assistant &amp; Management Platform</a:t>
             </a:r>
           </a:p>
         </p:txBody>
@@ -9957,8 +9912,8 @@
         </p:nvSpPr>
         <p:spPr>
           <a:xfrm>
-            <a:off x="731520" y="384048"/>
-            <a:ext cx="2926080" cy="292608"/>
+            <a:off x="731520" y="365760"/>
+            <a:ext cx="2560320" cy="320040"/>
           </a:xfrm>
           <a:prstGeom prst="roundRect">
             <a:avLst/>
@@ -9991,14 +9946,14 @@
           <a:lstStyle/>
           <a:p>
             <a:pPr algn="ctr">
-              <a:defRPr sz="1000" b="1">
+              <a:defRPr sz="1100" b="1">
                 <a:solidFill>
                   <a:srgbClr val="78350F"/>
                 </a:solidFill>
               </a:defRPr>
             </a:pPr>
             <a:r>
-              <a:t>● MLOPS HUB &amp; FINE-TUNING</a:t>
+              <a:t>CUSTOM AI MODELS</a:t>
             </a:r>
           </a:p>
         </p:txBody>
@@ -10011,7 +9966,7 @@
         </p:nvSpPr>
         <p:spPr>
           <a:xfrm>
-            <a:off x="731520" y="713232"/>
+            <a:off x="731520" y="731520"/>
             <a:ext cx="10728655" cy="594360"/>
           </a:xfrm>
           <a:prstGeom prst="rect">
@@ -10026,14 +9981,14 @@
           <a:lstStyle/>
           <a:p>
             <a:pPr>
-              <a:defRPr sz="2600" b="1">
+              <a:defRPr sz="3200" b="1">
                 <a:solidFill>
                   <a:srgbClr val="0F172A"/>
                 </a:solidFill>
               </a:defRPr>
             </a:pPr>
             <a:r>
-              <a:t>Advanced MLOps Capabilities: Model Registry &amp; Adapters</a:t>
+              <a:t>Custom AI Models &amp; Intelligent Drink Search</a:t>
             </a:r>
           </a:p>
         </p:txBody>
@@ -10046,8 +10001,8 @@
         </p:nvSpPr>
         <p:spPr>
           <a:xfrm>
-            <a:off x="731520" y="1298448"/>
-            <a:ext cx="10728655" cy="365760"/>
+            <a:off x="731520" y="1325880"/>
+            <a:ext cx="10728655" cy="411480"/>
           </a:xfrm>
           <a:prstGeom prst="rect">
             <a:avLst/>
@@ -10061,14 +10016,14 @@
           <a:lstStyle/>
           <a:p>
             <a:pPr>
-              <a:defRPr sz="1300">
-                <a:solidFill>
-                  <a:srgbClr val="475569"/>
-                </a:solidFill>
-              </a:defRPr>
-            </a:pPr>
-            <a:r>
-              <a:t>Proactive asset ownership through localized small language models and retrieval adapters.</a:t>
+              <a:defRPr sz="1500">
+                <a:solidFill>
+                  <a:srgbClr val="64748B"/>
+                </a:solidFill>
+              </a:defRPr>
+            </a:pPr>
+            <a:r>
+              <a:t>Tailoring AI models specifically to beverage ordering and local tastes.</a:t>
             </a:r>
           </a:p>
         </p:txBody>
@@ -10088,7 +10043,7 @@
             <a:avLst/>
           </a:prstGeom>
           <a:solidFill>
-            <a:srgbClr val="FFFFFF"/>
+            <a:srgbClr val="F8FAFC"/>
           </a:solidFill>
           <a:ln w="19050">
             <a:solidFill>
@@ -10127,13 +10082,13 @@
         <p:spPr>
           <a:xfrm>
             <a:off x="731520" y="1828800"/>
-            <a:ext cx="3383280" cy="73152"/>
+            <a:ext cx="3383280" cy="91440"/>
           </a:xfrm>
           <a:prstGeom prst="rect">
             <a:avLst/>
           </a:prstGeom>
           <a:solidFill>
-            <a:srgbClr val="B45309"/>
+            <a:srgbClr val="D97706"/>
           </a:solidFill>
           <a:ln>
             <a:noFill/>
@@ -10169,8 +10124,8 @@
         </p:nvSpPr>
         <p:spPr>
           <a:xfrm>
-            <a:off x="960120" y="1965960"/>
-            <a:ext cx="2926080" cy="4023360"/>
+            <a:off x="960120" y="2057400"/>
+            <a:ext cx="2926080" cy="3931920"/>
           </a:xfrm>
           <a:prstGeom prst="rect">
             <a:avLst/>
@@ -10184,76 +10139,76 @@
           <a:lstStyle/>
           <a:p>
             <a:pPr>
-              <a:defRPr sz="1700" b="1">
-                <a:solidFill>
-                  <a:srgbClr val="B45309"/>
-                </a:solidFill>
-              </a:defRPr>
-            </a:pPr>
-            <a:r>
-              <a:t>Model Registry &amp; Hub</a:t>
+              <a:defRPr sz="2100" b="1">
+                <a:solidFill>
+                  <a:srgbClr val="D97706"/>
+                </a:solidFill>
+              </a:defRPr>
+            </a:pPr>
+            <a:r>
+              <a:t>AI Model Registry</a:t>
             </a:r>
           </a:p>
           <a:p>
             <a:pPr>
               <a:spcBef>
-                <a:spcPts val="800"/>
+                <a:spcPts val="1200"/>
               </a:spcBef>
-              <a:defRPr sz="1300" b="1">
+              <a:defRPr sz="1600" b="1">
                 <a:solidFill>
                   <a:srgbClr val="0F172A"/>
                 </a:solidFill>
               </a:defRPr>
             </a:pPr>
             <a:r>
-              <a:t>• Centralized Tracking:</a:t>
-            </a:r>
-          </a:p>
-          <a:p>
-            <a:pPr>
-              <a:defRPr sz="1200">
-                <a:solidFill>
-                  <a:srgbClr val="475569"/>
-                </a:solidFill>
-              </a:defRPr>
-            </a:pPr>
-            <a:r>
-              <a:t>   Logs model checkpoints, hyperparameters (LR, batch, epochs), and metadata.</a:t>
+              <a:t>• Central Model Hub:</a:t>
+            </a:r>
+          </a:p>
+          <a:p>
+            <a:pPr>
+              <a:defRPr sz="1400">
+                <a:solidFill>
+                  <a:srgbClr val="1E293B"/>
+                </a:solidFill>
+              </a:defRPr>
+            </a:pPr>
+            <a:r>
+              <a:t>   Organizes trained models, training settings, and versions.</a:t>
             </a:r>
           </a:p>
           <a:p>
             <a:pPr>
               <a:spcBef>
-                <a:spcPts val="800"/>
+                <a:spcPts val="1200"/>
               </a:spcBef>
-              <a:defRPr sz="1300" b="1">
+              <a:defRPr sz="1600" b="1">
                 <a:solidFill>
                   <a:srgbClr val="0F172A"/>
                 </a:solidFill>
               </a:defRPr>
             </a:pPr>
             <a:r>
-              <a:t>• Loss History Graphs:</a:t>
-            </a:r>
-          </a:p>
-          <a:p>
-            <a:pPr>
-              <a:defRPr sz="1200">
-                <a:solidFill>
-                  <a:srgbClr val="475569"/>
-                </a:solidFill>
-              </a:defRPr>
-            </a:pPr>
-            <a:r>
-              <a:t>   Maintains epoch-by-epoch loss reduction curves for transparent model validation.</a:t>
+              <a:t>• Learning Progress:</a:t>
+            </a:r>
+          </a:p>
+          <a:p>
+            <a:pPr>
+              <a:defRPr sz="1400">
+                <a:solidFill>
+                  <a:srgbClr val="1E293B"/>
+                </a:solidFill>
+              </a:defRPr>
+            </a:pPr>
+            <a:r>
+              <a:t>   Tracks training loss curves and accuracy metrics over time.</a:t>
             </a:r>
           </a:p>
           <a:p>
             <a:pPr>
               <a:spcBef>
-                <a:spcPts val="800"/>
+                <a:spcPts val="1200"/>
               </a:spcBef>
-              <a:defRPr sz="1300" b="1">
+              <a:defRPr sz="1600" b="1">
                 <a:solidFill>
                   <a:srgbClr val="0F172A"/>
                 </a:solidFill>
@@ -10265,41 +10220,41 @@
           </a:p>
           <a:p>
             <a:pPr>
-              <a:defRPr sz="1200">
-                <a:solidFill>
-                  <a:srgbClr val="475569"/>
-                </a:solidFill>
-              </a:defRPr>
-            </a:pPr>
-            <a:r>
-              <a:t>   Binds model weights to cryptographic SHA-256 hashes of the training dataset.</a:t>
+              <a:defRPr sz="1400">
+                <a:solidFill>
+                  <a:srgbClr val="1E293B"/>
+                </a:solidFill>
+              </a:defRPr>
+            </a:pPr>
+            <a:r>
+              <a:t>   Connects model versions to exact training datasets for auditing.</a:t>
             </a:r>
           </a:p>
           <a:p>
             <a:pPr>
               <a:spcBef>
-                <a:spcPts val="800"/>
+                <a:spcPts val="1200"/>
               </a:spcBef>
-              <a:defRPr sz="1300" b="1">
+              <a:defRPr sz="1600" b="1">
                 <a:solidFill>
                   <a:srgbClr val="0F172A"/>
                 </a:solidFill>
               </a:defRPr>
             </a:pPr>
             <a:r>
-              <a:t>• Active Hot-Swap:</a:t>
-            </a:r>
-          </a:p>
-          <a:p>
-            <a:pPr>
-              <a:defRPr sz="1200">
-                <a:solidFill>
-                  <a:srgbClr val="475569"/>
-                </a:solidFill>
-              </a:defRPr>
-            </a:pPr>
-            <a:r>
-              <a:t>   Switch between candidate fine-tuned checkpoints directly via API.</a:t>
+              <a:t>• Seamless Model Swapping:</a:t>
+            </a:r>
+          </a:p>
+          <a:p>
+            <a:pPr>
+              <a:defRPr sz="1400">
+                <a:solidFill>
+                  <a:srgbClr val="1E293B"/>
+                </a:solidFill>
+              </a:defRPr>
+            </a:pPr>
+            <a:r>
+              <a:t>   Switch between candidate models easily from the admin panel.</a:t>
             </a:r>
           </a:p>
         </p:txBody>
@@ -10319,7 +10274,7 @@
             <a:avLst/>
           </a:prstGeom>
           <a:solidFill>
-            <a:srgbClr val="FFFFFF"/>
+            <a:srgbClr val="F8FAFC"/>
           </a:solidFill>
           <a:ln w="19050">
             <a:solidFill>
@@ -10358,13 +10313,13 @@
         <p:spPr>
           <a:xfrm>
             <a:off x="4389120" y="1828800"/>
-            <a:ext cx="3383280" cy="73152"/>
+            <a:ext cx="3383280" cy="91440"/>
           </a:xfrm>
           <a:prstGeom prst="rect">
             <a:avLst/>
           </a:prstGeom>
           <a:solidFill>
-            <a:srgbClr val="4338CA"/>
+            <a:srgbClr val="4F46E5"/>
           </a:solidFill>
           <a:ln>
             <a:noFill/>
@@ -10400,8 +10355,8 @@
         </p:nvSpPr>
         <p:spPr>
           <a:xfrm>
-            <a:off x="4617720" y="1965960"/>
-            <a:ext cx="2926080" cy="4023360"/>
+            <a:off x="4617720" y="2057400"/>
+            <a:ext cx="2926080" cy="3931920"/>
           </a:xfrm>
           <a:prstGeom prst="rect">
             <a:avLst/>
@@ -10415,122 +10370,122 @@
           <a:lstStyle/>
           <a:p>
             <a:pPr>
-              <a:defRPr sz="1700" b="1">
-                <a:solidFill>
-                  <a:srgbClr val="4338CA"/>
-                </a:solidFill>
-              </a:defRPr>
-            </a:pPr>
-            <a:r>
-              <a:t>Gemma 2B LoRA Fine-Tuning</a:t>
+              <a:defRPr sz="2100" b="1">
+                <a:solidFill>
+                  <a:srgbClr val="4F46E5"/>
+                </a:solidFill>
+              </a:defRPr>
+            </a:pPr>
+            <a:r>
+              <a:t>Specialized Drink AI</a:t>
             </a:r>
           </a:p>
           <a:p>
             <a:pPr>
               <a:spcBef>
-                <a:spcPts val="800"/>
+                <a:spcPts val="1200"/>
               </a:spcBef>
-              <a:defRPr sz="1300" b="1">
+              <a:defRPr sz="1600" b="1">
                 <a:solidFill>
                   <a:srgbClr val="0F172A"/>
                 </a:solidFill>
               </a:defRPr>
             </a:pPr>
             <a:r>
-              <a:t>• Base Foundation:</a:t>
-            </a:r>
-          </a:p>
-          <a:p>
-            <a:pPr>
-              <a:defRPr sz="1200">
-                <a:solidFill>
-                  <a:srgbClr val="475569"/>
-                </a:solidFill>
-              </a:defRPr>
-            </a:pPr>
-            <a:r>
-              <a:t>   google/gemma-2-2b-it fine-tuned for Vietnamese beverage conversational domain.</a:t>
+              <a:t>• Tailored Training:</a:t>
+            </a:r>
+          </a:p>
+          <a:p>
+            <a:pPr>
+              <a:defRPr sz="1400">
+                <a:solidFill>
+                  <a:srgbClr val="1E293B"/>
+                </a:solidFill>
+              </a:defRPr>
+            </a:pPr>
+            <a:r>
+              <a:t>   Fine-tuned specifically for natural beverage ordering conversations.</a:t>
             </a:r>
           </a:p>
           <a:p>
             <a:pPr>
               <a:spcBef>
-                <a:spcPts val="800"/>
+                <a:spcPts val="1200"/>
               </a:spcBef>
-              <a:defRPr sz="1300" b="1">
+              <a:defRPr sz="1600" b="1">
                 <a:solidFill>
                   <a:srgbClr val="0F172A"/>
                 </a:solidFill>
               </a:defRPr>
             </a:pPr>
             <a:r>
-              <a:t>• LoRA Hyperparameters:</a:t>
-            </a:r>
-          </a:p>
-          <a:p>
-            <a:pPr>
-              <a:defRPr sz="1200">
-                <a:solidFill>
-                  <a:srgbClr val="475569"/>
-                </a:solidFill>
-              </a:defRPr>
-            </a:pPr>
-            <a:r>
-              <a:t>   r=8, lora_alpha=16, target_modules=['q_proj', 'v_proj'] with AdamW.</a:t>
+              <a:t>• Lightweight &amp; Fast:</a:t>
+            </a:r>
+          </a:p>
+          <a:p>
+            <a:pPr>
+              <a:defRPr sz="1400">
+                <a:solidFill>
+                  <a:srgbClr val="1E293B"/>
+                </a:solidFill>
+              </a:defRPr>
+            </a:pPr>
+            <a:r>
+              <a:t>   Compact model architecture runs efficiently on local hardware.</a:t>
             </a:r>
           </a:p>
           <a:p>
             <a:pPr>
               <a:spcBef>
-                <a:spcPts val="800"/>
+                <a:spcPts val="1200"/>
               </a:spcBef>
-              <a:defRPr sz="1300" b="1">
+              <a:defRPr sz="1600" b="1">
                 <a:solidFill>
                   <a:srgbClr val="0F172A"/>
                 </a:solidFill>
               </a:defRPr>
             </a:pPr>
             <a:r>
-              <a:t>• Domain Adaptability:</a:t>
-            </a:r>
-          </a:p>
-          <a:p>
-            <a:pPr>
-              <a:defRPr sz="1200">
-                <a:solidFill>
-                  <a:srgbClr val="475569"/>
-                </a:solidFill>
-              </a:defRPr>
-            </a:pPr>
-            <a:r>
-              <a:t>   Trained on conversational drink ordering and preference extraction datasets.</a:t>
+              <a:t>• Local Drink Knowledge:</a:t>
+            </a:r>
+          </a:p>
+          <a:p>
+            <a:pPr>
+              <a:defRPr sz="1400">
+                <a:solidFill>
+                  <a:srgbClr val="1E293B"/>
+                </a:solidFill>
+              </a:defRPr>
+            </a:pPr>
+            <a:r>
+              <a:t>   Understands regional drink preferences and ordering phrasing.</a:t>
             </a:r>
           </a:p>
           <a:p>
             <a:pPr>
               <a:spcBef>
-                <a:spcPts val="800"/>
+                <a:spcPts val="1200"/>
               </a:spcBef>
-              <a:defRPr sz="1300" b="1">
+              <a:defRPr sz="1600" b="1">
                 <a:solidFill>
                   <a:srgbClr val="0F172A"/>
                 </a:solidFill>
               </a:defRPr>
             </a:pPr>
             <a:r>
-              <a:t>• Local Hardware Execution:</a:t>
-            </a:r>
-          </a:p>
-          <a:p>
-            <a:pPr>
-              <a:defRPr sz="1200">
-                <a:solidFill>
-                  <a:srgbClr val="475569"/>
-                </a:solidFill>
-              </a:defRPr>
-            </a:pPr>
-            <a:r>
-              <a:t>   Runs cleanly on standard desktop GPUs (RTX 3060) or multi-core CPU.</a:t>
+              <a:t>• Cost-Effective:</a:t>
+            </a:r>
+          </a:p>
+          <a:p>
+            <a:pPr>
+              <a:defRPr sz="1400">
+                <a:solidFill>
+                  <a:srgbClr val="1E293B"/>
+                </a:solidFill>
+              </a:defRPr>
+            </a:pPr>
+            <a:r>
+              <a:t>   Reduces reliance on expensive third-party cloud models.</a:t>
             </a:r>
           </a:p>
         </p:txBody>
@@ -10550,7 +10505,7 @@
             <a:avLst/>
           </a:prstGeom>
           <a:solidFill>
-            <a:srgbClr val="FFFFFF"/>
+            <a:srgbClr val="F8FAFC"/>
           </a:solidFill>
           <a:ln w="19050">
             <a:solidFill>
@@ -10589,7 +10544,7 @@
         <p:spPr>
           <a:xfrm>
             <a:off x="8046720" y="1828800"/>
-            <a:ext cx="3383280" cy="73152"/>
+            <a:ext cx="3383280" cy="91440"/>
           </a:xfrm>
           <a:prstGeom prst="rect">
             <a:avLst/>
@@ -10631,8 +10586,8 @@
         </p:nvSpPr>
         <p:spPr>
           <a:xfrm>
-            <a:off x="8275320" y="1965960"/>
-            <a:ext cx="2926080" cy="4023360"/>
+            <a:off x="8275320" y="2057400"/>
+            <a:ext cx="2926080" cy="3931920"/>
           </a:xfrm>
           <a:prstGeom prst="rect">
             <a:avLst/>
@@ -10646,122 +10601,122 @@
           <a:lstStyle/>
           <a:p>
             <a:pPr>
-              <a:defRPr sz="1700" b="1">
+              <a:defRPr sz="2100" b="1">
                 <a:solidFill>
                   <a:srgbClr val="047857"/>
                 </a:solidFill>
               </a:defRPr>
             </a:pPr>
             <a:r>
-              <a:t>Contrastive RAG Adapter</a:t>
+              <a:t>Smart Semantic Search</a:t>
             </a:r>
           </a:p>
           <a:p>
             <a:pPr>
               <a:spcBef>
-                <a:spcPts val="800"/>
+                <a:spcPts val="1200"/>
               </a:spcBef>
-              <a:defRPr sz="1300" b="1">
+              <a:defRPr sz="1600" b="1">
                 <a:solidFill>
                   <a:srgbClr val="0F172A"/>
                 </a:solidFill>
               </a:defRPr>
             </a:pPr>
             <a:r>
-              <a:t>• Semantic Enhancement:</a:t>
-            </a:r>
-          </a:p>
-          <a:p>
-            <a:pPr>
-              <a:defRPr sz="1200">
-                <a:solidFill>
-                  <a:srgbClr val="475569"/>
-                </a:solidFill>
-              </a:defRPr>
-            </a:pPr>
-            <a:r>
-              <a:t>   Trained on top of all-MiniLM-L6-v2 (384-dimensional vector space).</a:t>
+              <a:t>• Natural Search:</a:t>
+            </a:r>
+          </a:p>
+          <a:p>
+            <a:pPr>
+              <a:defRPr sz="1400">
+                <a:solidFill>
+                  <a:srgbClr val="1E293B"/>
+                </a:solidFill>
+              </a:defRPr>
+            </a:pPr>
+            <a:r>
+              <a:t>   Understands customer intent even when drink names are misspelled.</a:t>
             </a:r>
           </a:p>
           <a:p>
             <a:pPr>
               <a:spcBef>
-                <a:spcPts val="800"/>
+                <a:spcPts val="1200"/>
               </a:spcBef>
-              <a:defRPr sz="1300" b="1">
+              <a:defRPr sz="1600" b="1">
                 <a:solidFill>
                   <a:srgbClr val="0F172A"/>
                 </a:solidFill>
               </a:defRPr>
             </a:pPr>
             <a:r>
-              <a:t>• Adapter Architecture:</a:t>
-            </a:r>
-          </a:p>
-          <a:p>
-            <a:pPr>
-              <a:defRPr sz="1200">
-                <a:solidFill>
-                  <a:srgbClr val="475569"/>
-                </a:solidFill>
-              </a:defRPr>
-            </a:pPr>
-            <a:r>
-              <a:t>   Linear projection + LayerNorm + Residual connection with Contrastive Loss.</a:t>
+              <a:t>• Slang Recognition:</a:t>
+            </a:r>
+          </a:p>
+          <a:p>
+            <a:pPr>
+              <a:defRPr sz="1400">
+                <a:solidFill>
+                  <a:srgbClr val="1E293B"/>
+                </a:solidFill>
+              </a:defRPr>
+            </a:pPr>
+            <a:r>
+              <a:t>   Accurately interprets beverage slang and local drink nicknames.</a:t>
             </a:r>
           </a:p>
           <a:p>
             <a:pPr>
               <a:spcBef>
-                <a:spcPts val="800"/>
+                <a:spcPts val="1200"/>
               </a:spcBef>
-              <a:defRPr sz="1300" b="1">
+              <a:defRPr sz="1600" b="1">
                 <a:solidFill>
                   <a:srgbClr val="0F172A"/>
                 </a:solidFill>
               </a:defRPr>
             </a:pPr>
             <a:r>
-              <a:t>• F&amp;B Slang Handling:</a:t>
-            </a:r>
-          </a:p>
-          <a:p>
-            <a:pPr>
-              <a:defRPr sz="1200">
-                <a:solidFill>
-                  <a:srgbClr val="475569"/>
-                </a:solidFill>
-              </a:defRPr>
-            </a:pPr>
-            <a:r>
-              <a:t>   Accurately maps Vietnamese beverage slang ('bạc xỉu', 'trà mãng cầu').</a:t>
+              <a:t>• Smart Recommendations:</a:t>
+            </a:r>
+          </a:p>
+          <a:p>
+            <a:pPr>
+              <a:defRPr sz="1400">
+                <a:solidFill>
+                  <a:srgbClr val="1E293B"/>
+                </a:solidFill>
+              </a:defRPr>
+            </a:pPr>
+            <a:r>
+              <a:t>   Matches taste descriptions ('sweet but refreshing') to the menu.</a:t>
             </a:r>
           </a:p>
           <a:p>
             <a:pPr>
               <a:spcBef>
-                <a:spcPts val="800"/>
+                <a:spcPts val="1200"/>
               </a:spcBef>
-              <a:defRPr sz="1300" b="1">
+              <a:defRPr sz="1600" b="1">
                 <a:solidFill>
                   <a:srgbClr val="0F172A"/>
                 </a:solidFill>
               </a:defRPr>
             </a:pPr>
             <a:r>
-              <a:t>• Empirical Validation:</a:t>
-            </a:r>
-          </a:p>
-          <a:p>
-            <a:pPr>
-              <a:defRPr sz="1200">
-                <a:solidFill>
-                  <a:srgbClr val="475569"/>
-                </a:solidFill>
-              </a:defRPr>
-            </a:pPr>
-            <a:r>
-              <a:t>   Yields a +28.5% measured accuracy improvement in menu item retrieval.</a:t>
+              <a:t>• Proven Accuracy:</a:t>
+            </a:r>
+          </a:p>
+          <a:p>
+            <a:pPr>
+              <a:defRPr sz="1400">
+                <a:solidFill>
+                  <a:srgbClr val="1E293B"/>
+                </a:solidFill>
+              </a:defRPr>
+            </a:pPr>
+            <a:r>
+              <a:t>   Delivers +28.5% measured improvement in drink recommendation accuracy.</a:t>
             </a:r>
           </a:p>
         </p:txBody>
@@ -10799,7 +10754,7 @@
             <a:avLst/>
           </a:prstGeom>
           <a:solidFill>
-            <a:srgbClr val="F8FAFC"/>
+            <a:srgbClr val="FFFFFF"/>
           </a:solidFill>
           <a:ln>
             <a:noFill/>
@@ -10850,14 +10805,14 @@
           <a:lstStyle/>
           <a:p>
             <a:pPr>
-              <a:defRPr sz="1000">
-                <a:solidFill>
-                  <a:srgbClr val="94A3B8"/>
-                </a:solidFill>
-              </a:defRPr>
-            </a:pPr>
-            <a:r>
-              <a:t>DrinkBot MLOps • TMA Solutions F&amp;B AI Workshop 2026 • Backend Architecture Review</a:t>
+              <a:defRPr sz="1100">
+                <a:solidFill>
+                  <a:srgbClr val="64748B"/>
+                </a:solidFill>
+              </a:defRPr>
+            </a:pPr>
+            <a:r>
+              <a:t>DrinkBot MLOps • F&amp;B AI Assistant &amp; Management Platform</a:t>
             </a:r>
           </a:p>
         </p:txBody>
@@ -10870,8 +10825,8 @@
         </p:nvSpPr>
         <p:spPr>
           <a:xfrm>
-            <a:off x="731520" y="384048"/>
-            <a:ext cx="2926080" cy="292608"/>
+            <a:off x="731520" y="365760"/>
+            <a:ext cx="2560320" cy="320040"/>
           </a:xfrm>
           <a:prstGeom prst="roundRect">
             <a:avLst/>
@@ -10904,14 +10859,14 @@
           <a:lstStyle/>
           <a:p>
             <a:pPr algn="ctr">
-              <a:defRPr sz="1000" b="1">
+              <a:defRPr sz="1100" b="1">
                 <a:solidFill>
                   <a:srgbClr val="78350F"/>
                 </a:solidFill>
               </a:defRPr>
             </a:pPr>
             <a:r>
-              <a:t>● STATUS SCORECARD</a:t>
+              <a:t>WORKSHOP SCORECARD</a:t>
             </a:r>
           </a:p>
         </p:txBody>
@@ -10924,7 +10879,7 @@
         </p:nvSpPr>
         <p:spPr>
           <a:xfrm>
-            <a:off x="731520" y="713232"/>
+            <a:off x="731520" y="731520"/>
             <a:ext cx="10728655" cy="594360"/>
           </a:xfrm>
           <a:prstGeom prst="rect">
@@ -10939,14 +10894,14 @@
           <a:lstStyle/>
           <a:p>
             <a:pPr>
-              <a:defRPr sz="2600" b="1">
+              <a:defRPr sz="3200" b="1">
                 <a:solidFill>
                   <a:srgbClr val="0F172A"/>
                 </a:solidFill>
               </a:defRPr>
             </a:pPr>
             <a:r>
-              <a:t>Comprehensive Workshop Scorecard vs Requirements</a:t>
+              <a:t>Scorecard vs Workshop Deliverables</a:t>
             </a:r>
           </a:p>
         </p:txBody>
@@ -10959,8 +10914,8 @@
         </p:nvSpPr>
         <p:spPr>
           <a:xfrm>
-            <a:off x="731520" y="1298448"/>
-            <a:ext cx="10728655" cy="365760"/>
+            <a:off x="731520" y="1325880"/>
+            <a:ext cx="10728655" cy="411480"/>
           </a:xfrm>
           <a:prstGeom prst="rect">
             <a:avLst/>
@@ -10974,14 +10929,14 @@
           <a:lstStyle/>
           <a:p>
             <a:pPr>
-              <a:defRPr sz="1300">
-                <a:solidFill>
-                  <a:srgbClr val="475569"/>
-                </a:solidFill>
-              </a:defRPr>
-            </a:pPr>
-            <a:r>
-              <a:t>Direct, rigorous evaluation against workshop criteria and mentor feedback.</a:t>
+              <a:defRPr sz="1500">
+                <a:solidFill>
+                  <a:srgbClr val="64748B"/>
+                </a:solidFill>
+              </a:defRPr>
+            </a:pPr>
+            <a:r>
+              <a:t>Clear, transparent assessment against core project requirements.</a:t>
             </a:r>
           </a:p>
         </p:txBody>
@@ -11005,9 +10960,9 @@
                 <a:tableStyleId>{5C22544A-7EE6-4342-B048-85BDC9FD1C3A}</a:tableStyleId>
               </a:tblPr>
               <a:tblGrid>
-                <a:gridCol w="3474720"/>
-                <a:gridCol w="1645920"/>
-                <a:gridCol w="5608015"/>
+                <a:gridCol w="3840480"/>
+                <a:gridCol w="1828800"/>
+                <a:gridCol w="5059375"/>
               </a:tblGrid>
               <a:tr h="472440">
                 <a:tc>
@@ -11016,7 +10971,7 @@
                     <a:lstStyle/>
                     <a:p>
                       <a:pPr>
-                        <a:defRPr sz="1300" b="1">
+                        <a:defRPr sz="1400" b="1">
                           <a:solidFill>
                             <a:srgbClr val="FFFFFF"/>
                           </a:solidFill>
@@ -11039,7 +10994,7 @@
                     <a:lstStyle/>
                     <a:p>
                       <a:pPr algn="ctr">
-                        <a:defRPr sz="1200" b="1">
+                        <a:defRPr sz="1400" b="1">
                           <a:solidFill>
                             <a:srgbClr val="FFFFFF"/>
                           </a:solidFill>
@@ -11062,14 +11017,14 @@
                     <a:lstStyle/>
                     <a:p>
                       <a:pPr>
-                        <a:defRPr sz="1200" b="1">
+                        <a:defRPr sz="1400" b="1">
                           <a:solidFill>
                             <a:srgbClr val="FFFFFF"/>
                           </a:solidFill>
                         </a:defRPr>
                       </a:pPr>
                       <a:r>
-                        <a:t>Technical Proof &amp; Verification</a:t>
+                        <a:t>Technical Verification</a:t>
                       </a:r>
                     </a:p>
                   </a:txBody>
@@ -11087,14 +11042,14 @@
                     <a:lstStyle/>
                     <a:p>
                       <a:pPr>
-                        <a:defRPr sz="1300" b="1">
+                        <a:defRPr sz="1400" b="1">
                           <a:solidFill>
                             <a:srgbClr val="0F172A"/>
                           </a:solidFill>
                         </a:defRPr>
                       </a:pPr>
                       <a:r>
-                        <a:t>1. Collect name, phone, address → DB</a:t>
+                        <a:t>1. Collect customer name, phone, address</a:t>
                       </a:r>
                     </a:p>
                   </a:txBody>
@@ -11110,7 +11065,7 @@
                     <a:lstStyle/>
                     <a:p>
                       <a:pPr algn="ctr">
-                        <a:defRPr sz="1200" b="1">
+                        <a:defRPr sz="1400" b="1">
                           <a:solidFill>
                             <a:srgbClr val="047857"/>
                           </a:solidFill>
@@ -11133,14 +11088,14 @@
                     <a:lstStyle/>
                     <a:p>
                       <a:pPr>
-                        <a:defRPr sz="1200">
+                        <a:defRPr sz="1400">
                           <a:solidFill>
-                            <a:srgbClr val="475569"/>
+                            <a:srgbClr val="1E293B"/>
                           </a:solidFill>
                         </a:defRPr>
                       </a:pPr>
                       <a:r>
-                        <a:t>User entity with phone regex validation, registration &amp; profile endpoints.</a:t>
+                        <a:t>Validated contact fields saved in database.</a:t>
                       </a:r>
                     </a:p>
                   </a:txBody>
@@ -11158,7 +11113,7 @@
                     <a:lstStyle/>
                     <a:p>
                       <a:pPr>
-                        <a:defRPr sz="1300" b="1">
+                        <a:defRPr sz="1400" b="1">
                           <a:solidFill>
                             <a:srgbClr val="0F172A"/>
                           </a:solidFill>
@@ -11181,7 +11136,7 @@
                     <a:lstStyle/>
                     <a:p>
                       <a:pPr algn="ctr">
-                        <a:defRPr sz="1200" b="1">
+                        <a:defRPr sz="1400" b="1">
                           <a:solidFill>
                             <a:srgbClr val="047857"/>
                           </a:solidFill>
@@ -11204,14 +11159,14 @@
                     <a:lstStyle/>
                     <a:p>
                       <a:pPr>
-                        <a:defRPr sz="1200">
+                        <a:defRPr sz="1400">
                           <a:solidFill>
-                            <a:srgbClr val="475569"/>
+                            <a:srgbClr val="1E293B"/>
                           </a:solidFill>
                         </a:defRPr>
                       </a:pPr>
                       <a:r>
-                        <a:t>Catalog seeded with Protein shakes (3 items), Detox, Coffees, Teas. Tested.</a:t>
+                        <a:t>Catalog includes Protein, Detox, Coffee, and Tea.</a:t>
                       </a:r>
                     </a:p>
                   </a:txBody>
@@ -11229,14 +11184,14 @@
                     <a:lstStyle/>
                     <a:p>
                       <a:pPr>
-                        <a:defRPr sz="1300" b="1">
+                        <a:defRPr sz="1400" b="1">
                           <a:solidFill>
                             <a:srgbClr val="0F172A"/>
                           </a:solidFill>
                         </a:defRPr>
                       </a:pPr>
                       <a:r>
-                        <a:t>3. Log chat history to track accuracy</a:t>
+                        <a:t>3. Track chat history to monitor accuracy</a:t>
                       </a:r>
                     </a:p>
                   </a:txBody>
@@ -11252,7 +11207,7 @@
                     <a:lstStyle/>
                     <a:p>
                       <a:pPr algn="ctr">
-                        <a:defRPr sz="1200" b="1">
+                        <a:defRPr sz="1400" b="1">
                           <a:solidFill>
                             <a:srgbClr val="B45309"/>
                           </a:solidFill>
@@ -11275,14 +11230,14 @@
                     <a:lstStyle/>
                     <a:p>
                       <a:pPr>
-                        <a:defRPr sz="1200">
+                        <a:defRPr sz="1400">
                           <a:solidFill>
-                            <a:srgbClr val="475569"/>
+                            <a:srgbClr val="1E293B"/>
                           </a:solidFill>
                         </a:defRPr>
                       </a:pPr>
                       <a:r>
-                        <a:t>Messages, model name, tokens, and cost logged. Thumbs up/down pending.</a:t>
+                        <a:t>Messages, cost, and tokens logged; rating button next.</a:t>
                       </a:r>
                     </a:p>
                   </a:txBody>
@@ -11300,14 +11255,14 @@
                     <a:lstStyle/>
                     <a:p>
                       <a:pPr>
-                        <a:defRPr sz="1300" b="1">
+                        <a:defRPr sz="1400" b="1">
                           <a:solidFill>
                             <a:srgbClr val="BE123C"/>
                           </a:solidFill>
                         </a:defRPr>
                       </a:pPr>
                       <a:r>
-                        <a:t>4. App → VPC Endpoint → AWS Bedrock</a:t>
+                        <a:t>4. Enterprise Private Cloud AI Connection</a:t>
                       </a:r>
                     </a:p>
                   </a:txBody>
@@ -11323,7 +11278,7 @@
                     <a:lstStyle/>
                     <a:p>
                       <a:pPr algn="ctr">
-                        <a:defRPr sz="1200" b="1">
+                        <a:defRPr sz="1400" b="1">
                           <a:solidFill>
                             <a:srgbClr val="BE123C"/>
                           </a:solidFill>
@@ -11346,14 +11301,14 @@
                     <a:lstStyle/>
                     <a:p>
                       <a:pPr>
-                        <a:defRPr sz="1200">
+                        <a:defRPr sz="1400">
                           <a:solidFill>
-                            <a:srgbClr val="475569"/>
+                            <a:srgbClr val="1E293B"/>
                           </a:solidFill>
                         </a:defRPr>
                       </a:pPr>
                       <a:r>
-                        <a:t>Biggest gap: Currently direct OpenAI API and local Ollama within Docker.</a:t>
+                        <a:t>Currently using direct Cloud AI; Private Cloud next.</a:t>
                       </a:r>
                     </a:p>
                   </a:txBody>
@@ -11371,14 +11326,14 @@
                     <a:lstStyle/>
                     <a:p>
                       <a:pPr>
-                        <a:defRPr sz="1300" b="1">
+                        <a:defRPr sz="1400" b="1">
                           <a:solidFill>
                             <a:srgbClr val="0F172A"/>
                           </a:solidFill>
                         </a:defRPr>
                       </a:pPr>
                       <a:r>
-                        <a:t>5. Dockerize Backend &amp; Frontend</a:t>
+                        <a:t>5. Containerize with Docker for deployment</a:t>
                       </a:r>
                     </a:p>
                   </a:txBody>
@@ -11394,7 +11349,7 @@
                     <a:lstStyle/>
                     <a:p>
                       <a:pPr algn="ctr">
-                        <a:defRPr sz="1200" b="1">
+                        <a:defRPr sz="1400" b="1">
                           <a:solidFill>
                             <a:srgbClr val="047857"/>
                           </a:solidFill>
@@ -11417,14 +11372,14 @@
                     <a:lstStyle/>
                     <a:p>
                       <a:pPr>
-                        <a:defRPr sz="1200">
+                        <a:defRPr sz="1400">
                           <a:solidFill>
-                            <a:srgbClr val="475569"/>
+                            <a:srgbClr val="1E293B"/>
                           </a:solidFill>
                         </a:defRPr>
                       </a:pPr>
                       <a:r>
-                        <a:t>Production Dockerfiles + compose file (Postgres, Backend, Frontend, Nginx).</a:t>
+                        <a:t>Full Docker Compose setup for backend and database.</a:t>
                       </a:r>
                     </a:p>
                   </a:txBody>
@@ -11442,14 +11397,14 @@
                     <a:lstStyle/>
                     <a:p>
                       <a:pPr>
-                        <a:defRPr sz="1300" b="1">
+                        <a:defRPr sz="1400" b="1">
                           <a:solidFill>
                             <a:srgbClr val="0F172A"/>
                           </a:solidFill>
                         </a:defRPr>
                       </a:pPr>
                       <a:r>
-                        <a:t>6. Track model &amp; token usage per message</a:t>
+                        <a:t>6. Track AI model &amp; cost per message</a:t>
                       </a:r>
                     </a:p>
                   </a:txBody>
@@ -11465,7 +11420,7 @@
                     <a:lstStyle/>
                     <a:p>
                       <a:pPr algn="ctr">
-                        <a:defRPr sz="1200" b="1">
+                        <a:defRPr sz="1400" b="1">
                           <a:solidFill>
                             <a:srgbClr val="047857"/>
                           </a:solidFill>
@@ -11488,14 +11443,14 @@
                     <a:lstStyle/>
                     <a:p>
                       <a:pPr>
-                        <a:defRPr sz="1200">
+                        <a:defRPr sz="1400">
                           <a:solidFill>
-                            <a:srgbClr val="475569"/>
+                            <a:srgbClr val="1E293B"/>
                           </a:solidFill>
                         </a:defRPr>
                       </a:pPr>
                       <a:r>
-                        <a:t>Dedicated model_name, input_tokens, output_tokens, cost on ChatMessage.</a:t>
+                        <a:t>Tokens and expenses recorded for every interaction.</a:t>
                       </a:r>
                     </a:p>
                   </a:txBody>
@@ -11513,14 +11468,14 @@
                     <a:lstStyle/>
                     <a:p>
                       <a:pPr>
-                        <a:defRPr sz="1300" b="1">
+                        <a:defRPr sz="1400" b="1">
                           <a:solidFill>
                             <a:srgbClr val="0F172A"/>
                           </a:solidFill>
                         </a:defRPr>
                       </a:pPr>
                       <a:r>
-                        <a:t>7. Prompt version control &amp; rollback</a:t>
+                        <a:t>7. Prompt version control &amp; instant rollback</a:t>
                       </a:r>
                     </a:p>
                   </a:txBody>
@@ -11536,7 +11491,7 @@
                     <a:lstStyle/>
                     <a:p>
                       <a:pPr algn="ctr">
-                        <a:defRPr sz="1200" b="1">
+                        <a:defRPr sz="1400" b="1">
                           <a:solidFill>
                             <a:srgbClr val="047857"/>
                           </a:solidFill>
@@ -11559,14 +11514,14 @@
                     <a:lstStyle/>
                     <a:p>
                       <a:pPr>
-                        <a:defRPr sz="1200">
+                        <a:defRPr sz="1400">
                           <a:solidFill>
-                            <a:srgbClr val="475569"/>
+                            <a:srgbClr val="1E293B"/>
                           </a:solidFill>
                         </a:defRPr>
                       </a:pPr>
                       <a:r>
-                        <a:t>DB-backed PromptVersion store, SHA-256 hash, Admin activate/rollback APIs.</a:t>
+                        <a:t>Prompts managed in database with one-click restore.</a:t>
                       </a:r>
                     </a:p>
                   </a:txBody>
@@ -11584,14 +11539,14 @@
                     <a:lstStyle/>
                     <a:p>
                       <a:pPr>
-                        <a:defRPr sz="1300" b="1">
+                        <a:defRPr sz="1400" b="1">
                           <a:solidFill>
                             <a:srgbClr val="0F172A"/>
                           </a:solidFill>
                         </a:defRPr>
                       </a:pPr>
                       <a:r>
-                        <a:t>8. AI agent with human approval gate</a:t>
+                        <a:t>8. AI agent with human confirmation gate</a:t>
                       </a:r>
                     </a:p>
                   </a:txBody>
@@ -11607,7 +11562,7 @@
                     <a:lstStyle/>
                     <a:p>
                       <a:pPr algn="ctr">
-                        <a:defRPr sz="1200" b="1">
+                        <a:defRPr sz="1400" b="1">
                           <a:solidFill>
                             <a:srgbClr val="047857"/>
                           </a:solidFill>
@@ -11630,14 +11585,14 @@
                     <a:lstStyle/>
                     <a:p>
                       <a:pPr>
-                        <a:defRPr sz="1200">
+                        <a:defRPr sz="1400">
                           <a:solidFill>
-                            <a:srgbClr val="475569"/>
+                            <a:srgbClr val="1E293B"/>
                           </a:solidFill>
                         </a:defRPr>
                       </a:pPr>
                       <a:r>
-                        <a:t>2-stage approval: Order confirmation and profile preference confirmation.</a:t>
+                        <a:t>Customer confirms orders and profile updates before saving.</a:t>
                       </a:r>
                     </a:p>
                   </a:txBody>
@@ -11660,7 +11615,7 @@
         </p:nvSpPr>
         <p:spPr>
           <a:xfrm>
-            <a:off x="731520" y="6035040"/>
+            <a:off x="731520" y="6053328"/>
             <a:ext cx="10728655" cy="502920"/>
           </a:xfrm>
           <a:prstGeom prst="roundRect">
@@ -11705,7 +11660,7 @@
         </p:nvSpPr>
         <p:spPr>
           <a:xfrm>
-            <a:off x="914400" y="6053328"/>
+            <a:off x="914400" y="6080760"/>
             <a:ext cx="10332720" cy="457200"/>
           </a:xfrm>
           <a:prstGeom prst="rect">
@@ -11720,14 +11675,14 @@
           <a:lstStyle/>
           <a:p>
             <a:pPr>
-              <a:defRPr sz="1200" b="1">
+              <a:defRPr sz="1300" b="1">
                 <a:solidFill>
                   <a:srgbClr val="047857"/>
                 </a:solidFill>
               </a:defRPr>
             </a:pPr>
             <a:r>
-              <a:t>🎯 Overall Completion Rate: 7 out of 8 Core Requirements Completed (87.5%) • Priority Focus: AWS Bedrock VPC Endpoint.</a:t>
+              <a:t>🎯 Summary: 7 of 8 Core Requirements Completed (87.5%) • Focus next on Enterprise Private Cloud AI.</a:t>
             </a:r>
           </a:p>
         </p:txBody>
